--- a/1차프로젝트/1. 기획서_신혜린.pptx
+++ b/1차프로젝트/1. 기획서_신혜린.pptx
@@ -5,7 +5,7 @@
     <p:sldMasterId id="2147483648" r:id="rId1"/>
   </p:sldMasterIdLst>
   <p:notesMasterIdLst>
-    <p:notesMasterId r:id="rId8"/>
+    <p:notesMasterId r:id="rId16"/>
   </p:notesMasterIdLst>
   <p:sldIdLst>
     <p:sldId id="256" r:id="rId2"/>
@@ -14,6 +14,14 @@
     <p:sldId id="262" r:id="rId5"/>
     <p:sldId id="263" r:id="rId6"/>
     <p:sldId id="264" r:id="rId7"/>
+    <p:sldId id="265" r:id="rId8"/>
+    <p:sldId id="266" r:id="rId9"/>
+    <p:sldId id="267" r:id="rId10"/>
+    <p:sldId id="268" r:id="rId11"/>
+    <p:sldId id="269" r:id="rId12"/>
+    <p:sldId id="270" r:id="rId13"/>
+    <p:sldId id="271" r:id="rId14"/>
+    <p:sldId id="272" r:id="rId15"/>
   </p:sldIdLst>
   <p:sldSz cx="12192000" cy="6858000"/>
   <p:notesSz cx="6858000" cy="9144000"/>
@@ -599,7 +607,7 @@
           <a:p>
             <a:fld id="{97E71D51-8A19-4BEA-9750-E87DB394B54C}" type="datetimeFigureOut">
               <a:rPr lang="ko-KR" altLang="en-US" smtClean="0"/>
-              <a:t>2026-03-22</a:t>
+              <a:t>2026-03-23</a:t>
             </a:fld>
             <a:endParaRPr lang="ko-KR" altLang="en-US"/>
           </a:p>
@@ -1013,7 +1021,7 @@
           <a:p>
             <a:fld id="{2C027968-2FEC-4B32-BACB-7408E34A3E11}" type="datetimeFigureOut">
               <a:rPr lang="ko-KR" altLang="en-US" smtClean="0"/>
-              <a:t>2026-03-22</a:t>
+              <a:t>2026-03-23</a:t>
             </a:fld>
             <a:endParaRPr lang="ko-KR" altLang="en-US"/>
           </a:p>
@@ -1211,7 +1219,7 @@
           <a:p>
             <a:fld id="{2C027968-2FEC-4B32-BACB-7408E34A3E11}" type="datetimeFigureOut">
               <a:rPr lang="ko-KR" altLang="en-US" smtClean="0"/>
-              <a:t>2026-03-22</a:t>
+              <a:t>2026-03-23</a:t>
             </a:fld>
             <a:endParaRPr lang="ko-KR" altLang="en-US"/>
           </a:p>
@@ -1419,7 +1427,7 @@
           <a:p>
             <a:fld id="{2C027968-2FEC-4B32-BACB-7408E34A3E11}" type="datetimeFigureOut">
               <a:rPr lang="ko-KR" altLang="en-US" smtClean="0"/>
-              <a:t>2026-03-22</a:t>
+              <a:t>2026-03-23</a:t>
             </a:fld>
             <a:endParaRPr lang="ko-KR" altLang="en-US"/>
           </a:p>
@@ -1617,7 +1625,7 @@
           <a:p>
             <a:fld id="{2C027968-2FEC-4B32-BACB-7408E34A3E11}" type="datetimeFigureOut">
               <a:rPr lang="ko-KR" altLang="en-US" smtClean="0"/>
-              <a:t>2026-03-22</a:t>
+              <a:t>2026-03-23</a:t>
             </a:fld>
             <a:endParaRPr lang="ko-KR" altLang="en-US"/>
           </a:p>
@@ -1892,7 +1900,7 @@
           <a:p>
             <a:fld id="{2C027968-2FEC-4B32-BACB-7408E34A3E11}" type="datetimeFigureOut">
               <a:rPr lang="ko-KR" altLang="en-US" smtClean="0"/>
-              <a:t>2026-03-22</a:t>
+              <a:t>2026-03-23</a:t>
             </a:fld>
             <a:endParaRPr lang="ko-KR" altLang="en-US"/>
           </a:p>
@@ -2157,7 +2165,7 @@
           <a:p>
             <a:fld id="{2C027968-2FEC-4B32-BACB-7408E34A3E11}" type="datetimeFigureOut">
               <a:rPr lang="ko-KR" altLang="en-US" smtClean="0"/>
-              <a:t>2026-03-22</a:t>
+              <a:t>2026-03-23</a:t>
             </a:fld>
             <a:endParaRPr lang="ko-KR" altLang="en-US"/>
           </a:p>
@@ -2569,7 +2577,7 @@
           <a:p>
             <a:fld id="{2C027968-2FEC-4B32-BACB-7408E34A3E11}" type="datetimeFigureOut">
               <a:rPr lang="ko-KR" altLang="en-US" smtClean="0"/>
-              <a:t>2026-03-22</a:t>
+              <a:t>2026-03-23</a:t>
             </a:fld>
             <a:endParaRPr lang="ko-KR" altLang="en-US"/>
           </a:p>
@@ -2710,7 +2718,7 @@
           <a:p>
             <a:fld id="{2C027968-2FEC-4B32-BACB-7408E34A3E11}" type="datetimeFigureOut">
               <a:rPr lang="ko-KR" altLang="en-US" smtClean="0"/>
-              <a:t>2026-03-22</a:t>
+              <a:t>2026-03-23</a:t>
             </a:fld>
             <a:endParaRPr lang="ko-KR" altLang="en-US"/>
           </a:p>
@@ -2823,7 +2831,7 @@
           <a:p>
             <a:fld id="{2C027968-2FEC-4B32-BACB-7408E34A3E11}" type="datetimeFigureOut">
               <a:rPr lang="ko-KR" altLang="en-US" smtClean="0"/>
-              <a:t>2026-03-22</a:t>
+              <a:t>2026-03-23</a:t>
             </a:fld>
             <a:endParaRPr lang="ko-KR" altLang="en-US"/>
           </a:p>
@@ -3134,7 +3142,7 @@
           <a:p>
             <a:fld id="{2C027968-2FEC-4B32-BACB-7408E34A3E11}" type="datetimeFigureOut">
               <a:rPr lang="ko-KR" altLang="en-US" smtClean="0"/>
-              <a:t>2026-03-22</a:t>
+              <a:t>2026-03-23</a:t>
             </a:fld>
             <a:endParaRPr lang="ko-KR" altLang="en-US"/>
           </a:p>
@@ -3422,7 +3430,7 @@
           <a:p>
             <a:fld id="{2C027968-2FEC-4B32-BACB-7408E34A3E11}" type="datetimeFigureOut">
               <a:rPr lang="ko-KR" altLang="en-US" smtClean="0"/>
-              <a:t>2026-03-22</a:t>
+              <a:t>2026-03-23</a:t>
             </a:fld>
             <a:endParaRPr lang="ko-KR" altLang="en-US"/>
           </a:p>
@@ -3663,7 +3671,7 @@
           <a:p>
             <a:fld id="{2C027968-2FEC-4B32-BACB-7408E34A3E11}" type="datetimeFigureOut">
               <a:rPr lang="ko-KR" altLang="en-US" smtClean="0"/>
-              <a:t>2026-03-22</a:t>
+              <a:t>2026-03-23</a:t>
             </a:fld>
             <a:endParaRPr lang="ko-KR" altLang="en-US"/>
           </a:p>
@@ -4523,6 +4531,2486 @@
 </p:sld>
 </file>
 
+<file path=ppt/slides/slide10.xml><?xml version="1.0" encoding="utf-8"?>
+<p:sld xmlns:a="http://schemas.openxmlformats.org/drawingml/2006/main" xmlns:r="http://schemas.openxmlformats.org/officeDocument/2006/relationships" xmlns:p="http://schemas.openxmlformats.org/presentationml/2006/main">
+  <p:cSld>
+    <p:spTree>
+      <p:nvGrpSpPr>
+        <p:cNvPr id="1" name=""/>
+        <p:cNvGrpSpPr/>
+        <p:nvPr/>
+      </p:nvGrpSpPr>
+      <p:grpSpPr>
+        <a:xfrm>
+          <a:off x="0" y="0"/>
+          <a:ext cx="0" cy="0"/>
+          <a:chOff x="0" y="0"/>
+          <a:chExt cx="0" cy="0"/>
+        </a:xfrm>
+      </p:grpSpPr>
+      <p:pic>
+        <p:nvPicPr>
+          <p:cNvPr id="8" name="그림 7" descr="텍스트, 스크린샷, 폰트, 번호이(가) 표시된 사진&#10;&#10;AI가 생성한 콘텐츠는 부정확할 수 있습니다.">
+            <a:extLst>
+              <a:ext uri="{FF2B5EF4-FFF2-40B4-BE49-F238E27FC236}">
+                <a16:creationId xmlns:a16="http://schemas.microsoft.com/office/drawing/2014/main" id="{4B026C48-62D5-D4EA-CE84-5B67CE8201A0}"/>
+              </a:ext>
+            </a:extLst>
+          </p:cNvPr>
+          <p:cNvPicPr>
+            <a:picLocks noChangeAspect="1"/>
+          </p:cNvPicPr>
+          <p:nvPr/>
+        </p:nvPicPr>
+        <p:blipFill>
+          <a:blip r:embed="rId2">
+            <a:extLst>
+              <a:ext uri="{28A0092B-C50C-407E-A947-70E740481C1C}">
+                <a14:useLocalDpi xmlns:a14="http://schemas.microsoft.com/office/drawing/2010/main" val="0"/>
+              </a:ext>
+            </a:extLst>
+          </a:blip>
+          <a:stretch>
+            <a:fillRect/>
+          </a:stretch>
+        </p:blipFill>
+        <p:spPr>
+          <a:xfrm>
+            <a:off x="972000" y="1008000"/>
+            <a:ext cx="10364647" cy="5830113"/>
+          </a:xfrm>
+          <a:prstGeom prst="rect">
+            <a:avLst/>
+          </a:prstGeom>
+        </p:spPr>
+      </p:pic>
+      <p:sp>
+        <p:nvSpPr>
+          <p:cNvPr id="3" name="직사각형 2">
+            <a:extLst>
+              <a:ext uri="{FF2B5EF4-FFF2-40B4-BE49-F238E27FC236}">
+                <a16:creationId xmlns:a16="http://schemas.microsoft.com/office/drawing/2014/main" id="{A1BC658B-3A71-2467-CB33-03A51800EBDC}"/>
+              </a:ext>
+            </a:extLst>
+          </p:cNvPr>
+          <p:cNvSpPr/>
+          <p:nvPr/>
+        </p:nvSpPr>
+        <p:spPr>
+          <a:xfrm>
+            <a:off x="-1" y="0"/>
+            <a:ext cx="12193200" cy="432000"/>
+          </a:xfrm>
+          <a:prstGeom prst="rect">
+            <a:avLst/>
+          </a:prstGeom>
+          <a:solidFill>
+            <a:srgbClr val="FFC000"/>
+          </a:solidFill>
+          <a:ln>
+            <a:noFill/>
+          </a:ln>
+        </p:spPr>
+        <p:style>
+          <a:lnRef idx="2">
+            <a:schemeClr val="accent1">
+              <a:shade val="15000"/>
+            </a:schemeClr>
+          </a:lnRef>
+          <a:fillRef idx="1">
+            <a:schemeClr val="accent1"/>
+          </a:fillRef>
+          <a:effectRef idx="0">
+            <a:schemeClr val="accent1"/>
+          </a:effectRef>
+          <a:fontRef idx="minor">
+            <a:schemeClr val="lt1"/>
+          </a:fontRef>
+        </p:style>
+        <p:txBody>
+          <a:bodyPr rtlCol="0" anchor="ctr"/>
+          <a:lstStyle/>
+          <a:p>
+            <a:pPr algn="ctr"/>
+            <a:endParaRPr lang="ko-KR" altLang="en-US"/>
+          </a:p>
+        </p:txBody>
+      </p:sp>
+      <p:sp>
+        <p:nvSpPr>
+          <p:cNvPr id="4" name="사각형: 잘린 한쪽 모서리 3">
+            <a:extLst>
+              <a:ext uri="{FF2B5EF4-FFF2-40B4-BE49-F238E27FC236}">
+                <a16:creationId xmlns:a16="http://schemas.microsoft.com/office/drawing/2014/main" id="{6C29B8CC-D569-0884-2DE9-9DFCA7850BB2}"/>
+              </a:ext>
+            </a:extLst>
+          </p:cNvPr>
+          <p:cNvSpPr/>
+          <p:nvPr/>
+        </p:nvSpPr>
+        <p:spPr>
+          <a:xfrm>
+            <a:off x="-766" y="317921"/>
+            <a:ext cx="2880000" cy="775120"/>
+          </a:xfrm>
+          <a:prstGeom prst="snip1Rect">
+            <a:avLst/>
+          </a:prstGeom>
+          <a:solidFill>
+            <a:schemeClr val="bg1"/>
+          </a:solidFill>
+          <a:ln>
+            <a:noFill/>
+          </a:ln>
+        </p:spPr>
+        <p:style>
+          <a:lnRef idx="2">
+            <a:schemeClr val="accent1">
+              <a:shade val="15000"/>
+            </a:schemeClr>
+          </a:lnRef>
+          <a:fillRef idx="1">
+            <a:schemeClr val="accent1"/>
+          </a:fillRef>
+          <a:effectRef idx="0">
+            <a:schemeClr val="accent1"/>
+          </a:effectRef>
+          <a:fontRef idx="minor">
+            <a:schemeClr val="lt1"/>
+          </a:fontRef>
+        </p:style>
+        <p:txBody>
+          <a:bodyPr rtlCol="0" anchor="ctr"/>
+          <a:lstStyle/>
+          <a:p>
+            <a:pPr algn="ctr"/>
+            <a:endParaRPr lang="ko-KR" altLang="en-US" dirty="0"/>
+          </a:p>
+        </p:txBody>
+      </p:sp>
+      <p:sp>
+        <p:nvSpPr>
+          <p:cNvPr id="5" name="L 도형 4">
+            <a:extLst>
+              <a:ext uri="{FF2B5EF4-FFF2-40B4-BE49-F238E27FC236}">
+                <a16:creationId xmlns:a16="http://schemas.microsoft.com/office/drawing/2014/main" id="{4F9348AA-9546-4A2C-458A-3C5E0E7A8F87}"/>
+              </a:ext>
+            </a:extLst>
+          </p:cNvPr>
+          <p:cNvSpPr/>
+          <p:nvPr/>
+        </p:nvSpPr>
+        <p:spPr>
+          <a:xfrm rot="13500000">
+            <a:off x="11340286" y="125999"/>
+            <a:ext cx="180000" cy="180000"/>
+          </a:xfrm>
+          <a:prstGeom prst="corner">
+            <a:avLst/>
+          </a:prstGeom>
+          <a:solidFill>
+            <a:schemeClr val="bg1"/>
+          </a:solidFill>
+          <a:ln>
+            <a:noFill/>
+          </a:ln>
+        </p:spPr>
+        <p:style>
+          <a:lnRef idx="2">
+            <a:schemeClr val="accent1">
+              <a:shade val="15000"/>
+            </a:schemeClr>
+          </a:lnRef>
+          <a:fillRef idx="1">
+            <a:schemeClr val="accent1"/>
+          </a:fillRef>
+          <a:effectRef idx="0">
+            <a:schemeClr val="accent1"/>
+          </a:effectRef>
+          <a:fontRef idx="minor">
+            <a:schemeClr val="lt1"/>
+          </a:fontRef>
+        </p:style>
+        <p:txBody>
+          <a:bodyPr rtlCol="0" anchor="ctr"/>
+          <a:lstStyle/>
+          <a:p>
+            <a:pPr algn="ctr"/>
+            <a:endParaRPr lang="ko-KR" altLang="en-US" dirty="0"/>
+          </a:p>
+        </p:txBody>
+      </p:sp>
+      <p:sp>
+        <p:nvSpPr>
+          <p:cNvPr id="6" name="L 도형 5">
+            <a:extLst>
+              <a:ext uri="{FF2B5EF4-FFF2-40B4-BE49-F238E27FC236}">
+                <a16:creationId xmlns:a16="http://schemas.microsoft.com/office/drawing/2014/main" id="{CD0274B5-2FBB-CCC2-3FDF-6B688797683C}"/>
+              </a:ext>
+            </a:extLst>
+          </p:cNvPr>
+          <p:cNvSpPr/>
+          <p:nvPr/>
+        </p:nvSpPr>
+        <p:spPr>
+          <a:xfrm rot="13500000">
+            <a:off x="11595610" y="123995"/>
+            <a:ext cx="180000" cy="180000"/>
+          </a:xfrm>
+          <a:prstGeom prst="corner">
+            <a:avLst/>
+          </a:prstGeom>
+          <a:solidFill>
+            <a:schemeClr val="bg1"/>
+          </a:solidFill>
+          <a:ln>
+            <a:noFill/>
+          </a:ln>
+        </p:spPr>
+        <p:style>
+          <a:lnRef idx="2">
+            <a:schemeClr val="accent1">
+              <a:shade val="15000"/>
+            </a:schemeClr>
+          </a:lnRef>
+          <a:fillRef idx="1">
+            <a:schemeClr val="accent1"/>
+          </a:fillRef>
+          <a:effectRef idx="0">
+            <a:schemeClr val="accent1"/>
+          </a:effectRef>
+          <a:fontRef idx="minor">
+            <a:schemeClr val="lt1"/>
+          </a:fontRef>
+        </p:style>
+        <p:txBody>
+          <a:bodyPr rtlCol="0" anchor="ctr"/>
+          <a:lstStyle/>
+          <a:p>
+            <a:pPr algn="ctr"/>
+            <a:endParaRPr lang="ko-KR" altLang="en-US" dirty="0"/>
+          </a:p>
+        </p:txBody>
+      </p:sp>
+      <p:sp>
+        <p:nvSpPr>
+          <p:cNvPr id="7" name="L 도형 6">
+            <a:extLst>
+              <a:ext uri="{FF2B5EF4-FFF2-40B4-BE49-F238E27FC236}">
+                <a16:creationId xmlns:a16="http://schemas.microsoft.com/office/drawing/2014/main" id="{F55AB5B5-649B-F4D3-54AC-E78424F260C5}"/>
+              </a:ext>
+            </a:extLst>
+          </p:cNvPr>
+          <p:cNvSpPr/>
+          <p:nvPr/>
+        </p:nvSpPr>
+        <p:spPr>
+          <a:xfrm rot="13500000">
+            <a:off x="11849405" y="126000"/>
+            <a:ext cx="180000" cy="180000"/>
+          </a:xfrm>
+          <a:prstGeom prst="corner">
+            <a:avLst/>
+          </a:prstGeom>
+          <a:solidFill>
+            <a:schemeClr val="bg1"/>
+          </a:solidFill>
+          <a:ln>
+            <a:noFill/>
+          </a:ln>
+        </p:spPr>
+        <p:style>
+          <a:lnRef idx="2">
+            <a:schemeClr val="accent1">
+              <a:shade val="15000"/>
+            </a:schemeClr>
+          </a:lnRef>
+          <a:fillRef idx="1">
+            <a:schemeClr val="accent1"/>
+          </a:fillRef>
+          <a:effectRef idx="0">
+            <a:schemeClr val="accent1"/>
+          </a:effectRef>
+          <a:fontRef idx="minor">
+            <a:schemeClr val="lt1"/>
+          </a:fontRef>
+        </p:style>
+        <p:txBody>
+          <a:bodyPr rtlCol="0" anchor="ctr"/>
+          <a:lstStyle/>
+          <a:p>
+            <a:pPr algn="ctr"/>
+            <a:endParaRPr lang="ko-KR" altLang="en-US" dirty="0"/>
+          </a:p>
+        </p:txBody>
+      </p:sp>
+      <p:sp>
+        <p:nvSpPr>
+          <p:cNvPr id="9" name="직사각형 8">
+            <a:extLst>
+              <a:ext uri="{FF2B5EF4-FFF2-40B4-BE49-F238E27FC236}">
+                <a16:creationId xmlns:a16="http://schemas.microsoft.com/office/drawing/2014/main" id="{3F27DF61-677C-F35A-C9F2-52DBB017AE96}"/>
+              </a:ext>
+            </a:extLst>
+          </p:cNvPr>
+          <p:cNvSpPr/>
+          <p:nvPr/>
+        </p:nvSpPr>
+        <p:spPr>
+          <a:xfrm>
+            <a:off x="-766" y="1059394"/>
+            <a:ext cx="2880000" cy="18000"/>
+          </a:xfrm>
+          <a:prstGeom prst="rect">
+            <a:avLst/>
+          </a:prstGeom>
+          <a:solidFill>
+            <a:schemeClr val="bg2"/>
+          </a:solidFill>
+          <a:ln>
+            <a:noFill/>
+          </a:ln>
+        </p:spPr>
+        <p:style>
+          <a:lnRef idx="2">
+            <a:schemeClr val="accent1">
+              <a:shade val="15000"/>
+            </a:schemeClr>
+          </a:lnRef>
+          <a:fillRef idx="1">
+            <a:schemeClr val="accent1"/>
+          </a:fillRef>
+          <a:effectRef idx="0">
+            <a:schemeClr val="accent1"/>
+          </a:effectRef>
+          <a:fontRef idx="minor">
+            <a:schemeClr val="lt1"/>
+          </a:fontRef>
+        </p:style>
+        <p:txBody>
+          <a:bodyPr rtlCol="0" anchor="ctr"/>
+          <a:lstStyle/>
+          <a:p>
+            <a:pPr algn="ctr"/>
+            <a:endParaRPr lang="ko-KR" altLang="en-US"/>
+          </a:p>
+        </p:txBody>
+      </p:sp>
+      <p:sp>
+        <p:nvSpPr>
+          <p:cNvPr id="10" name="직사각형 9">
+            <a:extLst>
+              <a:ext uri="{FF2B5EF4-FFF2-40B4-BE49-F238E27FC236}">
+                <a16:creationId xmlns:a16="http://schemas.microsoft.com/office/drawing/2014/main" id="{BB74B0A1-2171-CBBC-C714-22F54AD41B9A}"/>
+              </a:ext>
+            </a:extLst>
+          </p:cNvPr>
+          <p:cNvSpPr/>
+          <p:nvPr/>
+        </p:nvSpPr>
+        <p:spPr>
+          <a:xfrm>
+            <a:off x="2771234" y="1068394"/>
+            <a:ext cx="108000" cy="108000"/>
+          </a:xfrm>
+          <a:prstGeom prst="rect">
+            <a:avLst/>
+          </a:prstGeom>
+          <a:solidFill>
+            <a:schemeClr val="bg2"/>
+          </a:solidFill>
+          <a:ln>
+            <a:noFill/>
+          </a:ln>
+        </p:spPr>
+        <p:style>
+          <a:lnRef idx="2">
+            <a:schemeClr val="accent1">
+              <a:shade val="15000"/>
+            </a:schemeClr>
+          </a:lnRef>
+          <a:fillRef idx="1">
+            <a:schemeClr val="accent1"/>
+          </a:fillRef>
+          <a:effectRef idx="0">
+            <a:schemeClr val="accent1"/>
+          </a:effectRef>
+          <a:fontRef idx="minor">
+            <a:schemeClr val="lt1"/>
+          </a:fontRef>
+        </p:style>
+        <p:txBody>
+          <a:bodyPr rtlCol="0" anchor="ctr"/>
+          <a:lstStyle/>
+          <a:p>
+            <a:pPr algn="ctr"/>
+            <a:endParaRPr lang="ko-KR" altLang="en-US" dirty="0"/>
+          </a:p>
+        </p:txBody>
+      </p:sp>
+      <p:sp>
+        <p:nvSpPr>
+          <p:cNvPr id="11" name="제목 1">
+            <a:extLst>
+              <a:ext uri="{FF2B5EF4-FFF2-40B4-BE49-F238E27FC236}">
+                <a16:creationId xmlns:a16="http://schemas.microsoft.com/office/drawing/2014/main" id="{67BCF6BD-0DE3-693F-558E-46D224F3BF53}"/>
+              </a:ext>
+            </a:extLst>
+          </p:cNvPr>
+          <p:cNvSpPr txBox="1">
+            <a:spLocks/>
+          </p:cNvSpPr>
+          <p:nvPr/>
+        </p:nvSpPr>
+        <p:spPr>
+          <a:xfrm>
+            <a:off x="-63341" y="341275"/>
+            <a:ext cx="5101624" cy="1289849"/>
+          </a:xfrm>
+          <a:prstGeom prst="rect">
+            <a:avLst/>
+          </a:prstGeom>
+        </p:spPr>
+        <p:txBody>
+          <a:bodyPr/>
+          <a:lstStyle>
+            <a:lvl1pPr algn="l" defTabSz="914400" rtl="0" eaLnBrk="1" latinLnBrk="1" hangingPunct="1">
+              <a:lnSpc>
+                <a:spcPct val="90000"/>
+              </a:lnSpc>
+              <a:spcBef>
+                <a:spcPct val="0"/>
+              </a:spcBef>
+              <a:buNone/>
+              <a:defRPr sz="4400" kern="1200">
+                <a:solidFill>
+                  <a:schemeClr val="tx1"/>
+                </a:solidFill>
+                <a:latin typeface="+mj-lt"/>
+                <a:ea typeface="+mj-ea"/>
+                <a:cs typeface="+mj-cs"/>
+              </a:defRPr>
+            </a:lvl1pPr>
+          </a:lstStyle>
+          <a:p>
+            <a:r>
+              <a:rPr lang="ko-KR" altLang="en-US" b="1" dirty="0">
+                <a:latin typeface="Noto Sans KR" panose="020B0200000000000000" pitchFamily="50" charset="-127"/>
+                <a:ea typeface="Noto Sans KR" panose="020B0200000000000000" pitchFamily="50" charset="-127"/>
+              </a:rPr>
+              <a:t>   </a:t>
+            </a:r>
+            <a:r>
+              <a:rPr lang="ko-KR" altLang="en-US" sz="3600" b="1" dirty="0">
+                <a:latin typeface="Noto Sans KR Black" panose="020B0200000000000000" pitchFamily="50" charset="-127"/>
+                <a:ea typeface="Noto Sans KR Black" panose="020B0200000000000000" pitchFamily="50" charset="-127"/>
+              </a:rPr>
+              <a:t>화면설계서</a:t>
+            </a:r>
+            <a:endParaRPr lang="ko-KR" altLang="en-US" sz="3600" dirty="0">
+              <a:latin typeface="Noto Sans KR Black" panose="020B0200000000000000" pitchFamily="50" charset="-127"/>
+              <a:ea typeface="Noto Sans KR Black" panose="020B0200000000000000" pitchFamily="50" charset="-127"/>
+            </a:endParaRPr>
+          </a:p>
+        </p:txBody>
+      </p:sp>
+    </p:spTree>
+    <p:extLst>
+      <p:ext uri="{BB962C8B-B14F-4D97-AF65-F5344CB8AC3E}">
+        <p14:creationId xmlns:p14="http://schemas.microsoft.com/office/powerpoint/2010/main" val="1170714801"/>
+      </p:ext>
+    </p:extLst>
+  </p:cSld>
+  <p:clrMapOvr>
+    <a:masterClrMapping/>
+  </p:clrMapOvr>
+</p:sld>
+</file>
+
+<file path=ppt/slides/slide11.xml><?xml version="1.0" encoding="utf-8"?>
+<p:sld xmlns:a="http://schemas.openxmlformats.org/drawingml/2006/main" xmlns:r="http://schemas.openxmlformats.org/officeDocument/2006/relationships" xmlns:p="http://schemas.openxmlformats.org/presentationml/2006/main">
+  <p:cSld>
+    <p:spTree>
+      <p:nvGrpSpPr>
+        <p:cNvPr id="1" name=""/>
+        <p:cNvGrpSpPr/>
+        <p:nvPr/>
+      </p:nvGrpSpPr>
+      <p:grpSpPr>
+        <a:xfrm>
+          <a:off x="0" y="0"/>
+          <a:ext cx="0" cy="0"/>
+          <a:chOff x="0" y="0"/>
+          <a:chExt cx="0" cy="0"/>
+        </a:xfrm>
+      </p:grpSpPr>
+      <p:pic>
+        <p:nvPicPr>
+          <p:cNvPr id="8" name="그림 7" descr="텍스트, 스크린샷, 폰트, 번호이(가) 표시된 사진&#10;&#10;AI가 생성한 콘텐츠는 부정확할 수 있습니다.">
+            <a:extLst>
+              <a:ext uri="{FF2B5EF4-FFF2-40B4-BE49-F238E27FC236}">
+                <a16:creationId xmlns:a16="http://schemas.microsoft.com/office/drawing/2014/main" id="{B2391D15-9D2F-A9DC-F4C0-D2CEB501BCE9}"/>
+              </a:ext>
+            </a:extLst>
+          </p:cNvPr>
+          <p:cNvPicPr>
+            <a:picLocks noChangeAspect="1"/>
+          </p:cNvPicPr>
+          <p:nvPr/>
+        </p:nvPicPr>
+        <p:blipFill>
+          <a:blip r:embed="rId2">
+            <a:extLst>
+              <a:ext uri="{28A0092B-C50C-407E-A947-70E740481C1C}">
+                <a14:useLocalDpi xmlns:a14="http://schemas.microsoft.com/office/drawing/2010/main" val="0"/>
+              </a:ext>
+            </a:extLst>
+          </a:blip>
+          <a:stretch>
+            <a:fillRect/>
+          </a:stretch>
+        </p:blipFill>
+        <p:spPr>
+          <a:xfrm>
+            <a:off x="972000" y="1008000"/>
+            <a:ext cx="10364647" cy="5830113"/>
+          </a:xfrm>
+          <a:prstGeom prst="rect">
+            <a:avLst/>
+          </a:prstGeom>
+        </p:spPr>
+      </p:pic>
+      <p:sp>
+        <p:nvSpPr>
+          <p:cNvPr id="3" name="직사각형 2">
+            <a:extLst>
+              <a:ext uri="{FF2B5EF4-FFF2-40B4-BE49-F238E27FC236}">
+                <a16:creationId xmlns:a16="http://schemas.microsoft.com/office/drawing/2014/main" id="{A1BC658B-3A71-2467-CB33-03A51800EBDC}"/>
+              </a:ext>
+            </a:extLst>
+          </p:cNvPr>
+          <p:cNvSpPr/>
+          <p:nvPr/>
+        </p:nvSpPr>
+        <p:spPr>
+          <a:xfrm>
+            <a:off x="-1" y="0"/>
+            <a:ext cx="12193200" cy="432000"/>
+          </a:xfrm>
+          <a:prstGeom prst="rect">
+            <a:avLst/>
+          </a:prstGeom>
+          <a:solidFill>
+            <a:srgbClr val="FFC000"/>
+          </a:solidFill>
+          <a:ln>
+            <a:noFill/>
+          </a:ln>
+        </p:spPr>
+        <p:style>
+          <a:lnRef idx="2">
+            <a:schemeClr val="accent1">
+              <a:shade val="15000"/>
+            </a:schemeClr>
+          </a:lnRef>
+          <a:fillRef idx="1">
+            <a:schemeClr val="accent1"/>
+          </a:fillRef>
+          <a:effectRef idx="0">
+            <a:schemeClr val="accent1"/>
+          </a:effectRef>
+          <a:fontRef idx="minor">
+            <a:schemeClr val="lt1"/>
+          </a:fontRef>
+        </p:style>
+        <p:txBody>
+          <a:bodyPr rtlCol="0" anchor="ctr"/>
+          <a:lstStyle/>
+          <a:p>
+            <a:pPr algn="ctr"/>
+            <a:endParaRPr lang="ko-KR" altLang="en-US"/>
+          </a:p>
+        </p:txBody>
+      </p:sp>
+      <p:sp>
+        <p:nvSpPr>
+          <p:cNvPr id="4" name="사각형: 잘린 한쪽 모서리 3">
+            <a:extLst>
+              <a:ext uri="{FF2B5EF4-FFF2-40B4-BE49-F238E27FC236}">
+                <a16:creationId xmlns:a16="http://schemas.microsoft.com/office/drawing/2014/main" id="{6C29B8CC-D569-0884-2DE9-9DFCA7850BB2}"/>
+              </a:ext>
+            </a:extLst>
+          </p:cNvPr>
+          <p:cNvSpPr/>
+          <p:nvPr/>
+        </p:nvSpPr>
+        <p:spPr>
+          <a:xfrm>
+            <a:off x="-766" y="317921"/>
+            <a:ext cx="2880000" cy="775120"/>
+          </a:xfrm>
+          <a:prstGeom prst="snip1Rect">
+            <a:avLst/>
+          </a:prstGeom>
+          <a:solidFill>
+            <a:schemeClr val="bg1"/>
+          </a:solidFill>
+          <a:ln>
+            <a:noFill/>
+          </a:ln>
+        </p:spPr>
+        <p:style>
+          <a:lnRef idx="2">
+            <a:schemeClr val="accent1">
+              <a:shade val="15000"/>
+            </a:schemeClr>
+          </a:lnRef>
+          <a:fillRef idx="1">
+            <a:schemeClr val="accent1"/>
+          </a:fillRef>
+          <a:effectRef idx="0">
+            <a:schemeClr val="accent1"/>
+          </a:effectRef>
+          <a:fontRef idx="minor">
+            <a:schemeClr val="lt1"/>
+          </a:fontRef>
+        </p:style>
+        <p:txBody>
+          <a:bodyPr rtlCol="0" anchor="ctr"/>
+          <a:lstStyle/>
+          <a:p>
+            <a:pPr algn="ctr"/>
+            <a:endParaRPr lang="ko-KR" altLang="en-US" dirty="0"/>
+          </a:p>
+        </p:txBody>
+      </p:sp>
+      <p:sp>
+        <p:nvSpPr>
+          <p:cNvPr id="5" name="L 도형 4">
+            <a:extLst>
+              <a:ext uri="{FF2B5EF4-FFF2-40B4-BE49-F238E27FC236}">
+                <a16:creationId xmlns:a16="http://schemas.microsoft.com/office/drawing/2014/main" id="{4F9348AA-9546-4A2C-458A-3C5E0E7A8F87}"/>
+              </a:ext>
+            </a:extLst>
+          </p:cNvPr>
+          <p:cNvSpPr/>
+          <p:nvPr/>
+        </p:nvSpPr>
+        <p:spPr>
+          <a:xfrm rot="13500000">
+            <a:off x="11340286" y="125999"/>
+            <a:ext cx="180000" cy="180000"/>
+          </a:xfrm>
+          <a:prstGeom prst="corner">
+            <a:avLst/>
+          </a:prstGeom>
+          <a:solidFill>
+            <a:schemeClr val="bg1"/>
+          </a:solidFill>
+          <a:ln>
+            <a:noFill/>
+          </a:ln>
+        </p:spPr>
+        <p:style>
+          <a:lnRef idx="2">
+            <a:schemeClr val="accent1">
+              <a:shade val="15000"/>
+            </a:schemeClr>
+          </a:lnRef>
+          <a:fillRef idx="1">
+            <a:schemeClr val="accent1"/>
+          </a:fillRef>
+          <a:effectRef idx="0">
+            <a:schemeClr val="accent1"/>
+          </a:effectRef>
+          <a:fontRef idx="minor">
+            <a:schemeClr val="lt1"/>
+          </a:fontRef>
+        </p:style>
+        <p:txBody>
+          <a:bodyPr rtlCol="0" anchor="ctr"/>
+          <a:lstStyle/>
+          <a:p>
+            <a:pPr algn="ctr"/>
+            <a:endParaRPr lang="ko-KR" altLang="en-US" dirty="0"/>
+          </a:p>
+        </p:txBody>
+      </p:sp>
+      <p:sp>
+        <p:nvSpPr>
+          <p:cNvPr id="6" name="L 도형 5">
+            <a:extLst>
+              <a:ext uri="{FF2B5EF4-FFF2-40B4-BE49-F238E27FC236}">
+                <a16:creationId xmlns:a16="http://schemas.microsoft.com/office/drawing/2014/main" id="{CD0274B5-2FBB-CCC2-3FDF-6B688797683C}"/>
+              </a:ext>
+            </a:extLst>
+          </p:cNvPr>
+          <p:cNvSpPr/>
+          <p:nvPr/>
+        </p:nvSpPr>
+        <p:spPr>
+          <a:xfrm rot="13500000">
+            <a:off x="11595610" y="123995"/>
+            <a:ext cx="180000" cy="180000"/>
+          </a:xfrm>
+          <a:prstGeom prst="corner">
+            <a:avLst/>
+          </a:prstGeom>
+          <a:solidFill>
+            <a:schemeClr val="bg1"/>
+          </a:solidFill>
+          <a:ln>
+            <a:noFill/>
+          </a:ln>
+        </p:spPr>
+        <p:style>
+          <a:lnRef idx="2">
+            <a:schemeClr val="accent1">
+              <a:shade val="15000"/>
+            </a:schemeClr>
+          </a:lnRef>
+          <a:fillRef idx="1">
+            <a:schemeClr val="accent1"/>
+          </a:fillRef>
+          <a:effectRef idx="0">
+            <a:schemeClr val="accent1"/>
+          </a:effectRef>
+          <a:fontRef idx="minor">
+            <a:schemeClr val="lt1"/>
+          </a:fontRef>
+        </p:style>
+        <p:txBody>
+          <a:bodyPr rtlCol="0" anchor="ctr"/>
+          <a:lstStyle/>
+          <a:p>
+            <a:pPr algn="ctr"/>
+            <a:endParaRPr lang="ko-KR" altLang="en-US" dirty="0"/>
+          </a:p>
+        </p:txBody>
+      </p:sp>
+      <p:sp>
+        <p:nvSpPr>
+          <p:cNvPr id="7" name="L 도형 6">
+            <a:extLst>
+              <a:ext uri="{FF2B5EF4-FFF2-40B4-BE49-F238E27FC236}">
+                <a16:creationId xmlns:a16="http://schemas.microsoft.com/office/drawing/2014/main" id="{F55AB5B5-649B-F4D3-54AC-E78424F260C5}"/>
+              </a:ext>
+            </a:extLst>
+          </p:cNvPr>
+          <p:cNvSpPr/>
+          <p:nvPr/>
+        </p:nvSpPr>
+        <p:spPr>
+          <a:xfrm rot="13500000">
+            <a:off x="11849405" y="126000"/>
+            <a:ext cx="180000" cy="180000"/>
+          </a:xfrm>
+          <a:prstGeom prst="corner">
+            <a:avLst/>
+          </a:prstGeom>
+          <a:solidFill>
+            <a:schemeClr val="bg1"/>
+          </a:solidFill>
+          <a:ln>
+            <a:noFill/>
+          </a:ln>
+        </p:spPr>
+        <p:style>
+          <a:lnRef idx="2">
+            <a:schemeClr val="accent1">
+              <a:shade val="15000"/>
+            </a:schemeClr>
+          </a:lnRef>
+          <a:fillRef idx="1">
+            <a:schemeClr val="accent1"/>
+          </a:fillRef>
+          <a:effectRef idx="0">
+            <a:schemeClr val="accent1"/>
+          </a:effectRef>
+          <a:fontRef idx="minor">
+            <a:schemeClr val="lt1"/>
+          </a:fontRef>
+        </p:style>
+        <p:txBody>
+          <a:bodyPr rtlCol="0" anchor="ctr"/>
+          <a:lstStyle/>
+          <a:p>
+            <a:pPr algn="ctr"/>
+            <a:endParaRPr lang="ko-KR" altLang="en-US" dirty="0"/>
+          </a:p>
+        </p:txBody>
+      </p:sp>
+      <p:sp>
+        <p:nvSpPr>
+          <p:cNvPr id="9" name="직사각형 8">
+            <a:extLst>
+              <a:ext uri="{FF2B5EF4-FFF2-40B4-BE49-F238E27FC236}">
+                <a16:creationId xmlns:a16="http://schemas.microsoft.com/office/drawing/2014/main" id="{3F27DF61-677C-F35A-C9F2-52DBB017AE96}"/>
+              </a:ext>
+            </a:extLst>
+          </p:cNvPr>
+          <p:cNvSpPr/>
+          <p:nvPr/>
+        </p:nvSpPr>
+        <p:spPr>
+          <a:xfrm>
+            <a:off x="-766" y="1059394"/>
+            <a:ext cx="2880000" cy="18000"/>
+          </a:xfrm>
+          <a:prstGeom prst="rect">
+            <a:avLst/>
+          </a:prstGeom>
+          <a:solidFill>
+            <a:schemeClr val="bg2"/>
+          </a:solidFill>
+          <a:ln>
+            <a:noFill/>
+          </a:ln>
+        </p:spPr>
+        <p:style>
+          <a:lnRef idx="2">
+            <a:schemeClr val="accent1">
+              <a:shade val="15000"/>
+            </a:schemeClr>
+          </a:lnRef>
+          <a:fillRef idx="1">
+            <a:schemeClr val="accent1"/>
+          </a:fillRef>
+          <a:effectRef idx="0">
+            <a:schemeClr val="accent1"/>
+          </a:effectRef>
+          <a:fontRef idx="minor">
+            <a:schemeClr val="lt1"/>
+          </a:fontRef>
+        </p:style>
+        <p:txBody>
+          <a:bodyPr rtlCol="0" anchor="ctr"/>
+          <a:lstStyle/>
+          <a:p>
+            <a:pPr algn="ctr"/>
+            <a:endParaRPr lang="ko-KR" altLang="en-US"/>
+          </a:p>
+        </p:txBody>
+      </p:sp>
+      <p:sp>
+        <p:nvSpPr>
+          <p:cNvPr id="10" name="직사각형 9">
+            <a:extLst>
+              <a:ext uri="{FF2B5EF4-FFF2-40B4-BE49-F238E27FC236}">
+                <a16:creationId xmlns:a16="http://schemas.microsoft.com/office/drawing/2014/main" id="{BB74B0A1-2171-CBBC-C714-22F54AD41B9A}"/>
+              </a:ext>
+            </a:extLst>
+          </p:cNvPr>
+          <p:cNvSpPr/>
+          <p:nvPr/>
+        </p:nvSpPr>
+        <p:spPr>
+          <a:xfrm>
+            <a:off x="2771234" y="1068394"/>
+            <a:ext cx="108000" cy="108000"/>
+          </a:xfrm>
+          <a:prstGeom prst="rect">
+            <a:avLst/>
+          </a:prstGeom>
+          <a:solidFill>
+            <a:schemeClr val="bg2"/>
+          </a:solidFill>
+          <a:ln>
+            <a:noFill/>
+          </a:ln>
+        </p:spPr>
+        <p:style>
+          <a:lnRef idx="2">
+            <a:schemeClr val="accent1">
+              <a:shade val="15000"/>
+            </a:schemeClr>
+          </a:lnRef>
+          <a:fillRef idx="1">
+            <a:schemeClr val="accent1"/>
+          </a:fillRef>
+          <a:effectRef idx="0">
+            <a:schemeClr val="accent1"/>
+          </a:effectRef>
+          <a:fontRef idx="minor">
+            <a:schemeClr val="lt1"/>
+          </a:fontRef>
+        </p:style>
+        <p:txBody>
+          <a:bodyPr rtlCol="0" anchor="ctr"/>
+          <a:lstStyle/>
+          <a:p>
+            <a:pPr algn="ctr"/>
+            <a:endParaRPr lang="ko-KR" altLang="en-US" dirty="0"/>
+          </a:p>
+        </p:txBody>
+      </p:sp>
+      <p:sp>
+        <p:nvSpPr>
+          <p:cNvPr id="11" name="제목 1">
+            <a:extLst>
+              <a:ext uri="{FF2B5EF4-FFF2-40B4-BE49-F238E27FC236}">
+                <a16:creationId xmlns:a16="http://schemas.microsoft.com/office/drawing/2014/main" id="{67BCF6BD-0DE3-693F-558E-46D224F3BF53}"/>
+              </a:ext>
+            </a:extLst>
+          </p:cNvPr>
+          <p:cNvSpPr txBox="1">
+            <a:spLocks/>
+          </p:cNvSpPr>
+          <p:nvPr/>
+        </p:nvSpPr>
+        <p:spPr>
+          <a:xfrm>
+            <a:off x="-63341" y="341275"/>
+            <a:ext cx="5101624" cy="1289849"/>
+          </a:xfrm>
+          <a:prstGeom prst="rect">
+            <a:avLst/>
+          </a:prstGeom>
+        </p:spPr>
+        <p:txBody>
+          <a:bodyPr/>
+          <a:lstStyle>
+            <a:lvl1pPr algn="l" defTabSz="914400" rtl="0" eaLnBrk="1" latinLnBrk="1" hangingPunct="1">
+              <a:lnSpc>
+                <a:spcPct val="90000"/>
+              </a:lnSpc>
+              <a:spcBef>
+                <a:spcPct val="0"/>
+              </a:spcBef>
+              <a:buNone/>
+              <a:defRPr sz="4400" kern="1200">
+                <a:solidFill>
+                  <a:schemeClr val="tx1"/>
+                </a:solidFill>
+                <a:latin typeface="+mj-lt"/>
+                <a:ea typeface="+mj-ea"/>
+                <a:cs typeface="+mj-cs"/>
+              </a:defRPr>
+            </a:lvl1pPr>
+          </a:lstStyle>
+          <a:p>
+            <a:r>
+              <a:rPr lang="ko-KR" altLang="en-US" b="1" dirty="0">
+                <a:latin typeface="Noto Sans KR" panose="020B0200000000000000" pitchFamily="50" charset="-127"/>
+                <a:ea typeface="Noto Sans KR" panose="020B0200000000000000" pitchFamily="50" charset="-127"/>
+              </a:rPr>
+              <a:t>   </a:t>
+            </a:r>
+            <a:r>
+              <a:rPr lang="ko-KR" altLang="en-US" sz="3600" b="1" dirty="0">
+                <a:latin typeface="Noto Sans KR Black" panose="020B0200000000000000" pitchFamily="50" charset="-127"/>
+                <a:ea typeface="Noto Sans KR Black" panose="020B0200000000000000" pitchFamily="50" charset="-127"/>
+              </a:rPr>
+              <a:t>화면설계서</a:t>
+            </a:r>
+            <a:endParaRPr lang="ko-KR" altLang="en-US" sz="3600" dirty="0">
+              <a:latin typeface="Noto Sans KR Black" panose="020B0200000000000000" pitchFamily="50" charset="-127"/>
+              <a:ea typeface="Noto Sans KR Black" panose="020B0200000000000000" pitchFamily="50" charset="-127"/>
+            </a:endParaRPr>
+          </a:p>
+        </p:txBody>
+      </p:sp>
+    </p:spTree>
+    <p:extLst>
+      <p:ext uri="{BB962C8B-B14F-4D97-AF65-F5344CB8AC3E}">
+        <p14:creationId xmlns:p14="http://schemas.microsoft.com/office/powerpoint/2010/main" val="3873248661"/>
+      </p:ext>
+    </p:extLst>
+  </p:cSld>
+  <p:clrMapOvr>
+    <a:masterClrMapping/>
+  </p:clrMapOvr>
+</p:sld>
+</file>
+
+<file path=ppt/slides/slide12.xml><?xml version="1.0" encoding="utf-8"?>
+<p:sld xmlns:a="http://schemas.openxmlformats.org/drawingml/2006/main" xmlns:r="http://schemas.openxmlformats.org/officeDocument/2006/relationships" xmlns:p="http://schemas.openxmlformats.org/presentationml/2006/main">
+  <p:cSld>
+    <p:spTree>
+      <p:nvGrpSpPr>
+        <p:cNvPr id="1" name=""/>
+        <p:cNvGrpSpPr/>
+        <p:nvPr/>
+      </p:nvGrpSpPr>
+      <p:grpSpPr>
+        <a:xfrm>
+          <a:off x="0" y="0"/>
+          <a:ext cx="0" cy="0"/>
+          <a:chOff x="0" y="0"/>
+          <a:chExt cx="0" cy="0"/>
+        </a:xfrm>
+      </p:grpSpPr>
+      <p:pic>
+        <p:nvPicPr>
+          <p:cNvPr id="8" name="그림 7" descr="텍스트, 스크린샷, 폰트, 번호이(가) 표시된 사진&#10;&#10;AI가 생성한 콘텐츠는 부정확할 수 있습니다.">
+            <a:extLst>
+              <a:ext uri="{FF2B5EF4-FFF2-40B4-BE49-F238E27FC236}">
+                <a16:creationId xmlns:a16="http://schemas.microsoft.com/office/drawing/2014/main" id="{F9E5380A-054D-21BA-1B18-D8BD8AD2A5E9}"/>
+              </a:ext>
+            </a:extLst>
+          </p:cNvPr>
+          <p:cNvPicPr>
+            <a:picLocks noChangeAspect="1"/>
+          </p:cNvPicPr>
+          <p:nvPr/>
+        </p:nvPicPr>
+        <p:blipFill>
+          <a:blip r:embed="rId2">
+            <a:extLst>
+              <a:ext uri="{28A0092B-C50C-407E-A947-70E740481C1C}">
+                <a14:useLocalDpi xmlns:a14="http://schemas.microsoft.com/office/drawing/2010/main" val="0"/>
+              </a:ext>
+            </a:extLst>
+          </a:blip>
+          <a:stretch>
+            <a:fillRect/>
+          </a:stretch>
+        </p:blipFill>
+        <p:spPr>
+          <a:xfrm>
+            <a:off x="972000" y="1008000"/>
+            <a:ext cx="10364647" cy="5830113"/>
+          </a:xfrm>
+          <a:prstGeom prst="rect">
+            <a:avLst/>
+          </a:prstGeom>
+        </p:spPr>
+      </p:pic>
+      <p:sp>
+        <p:nvSpPr>
+          <p:cNvPr id="3" name="직사각형 2">
+            <a:extLst>
+              <a:ext uri="{FF2B5EF4-FFF2-40B4-BE49-F238E27FC236}">
+                <a16:creationId xmlns:a16="http://schemas.microsoft.com/office/drawing/2014/main" id="{A1BC658B-3A71-2467-CB33-03A51800EBDC}"/>
+              </a:ext>
+            </a:extLst>
+          </p:cNvPr>
+          <p:cNvSpPr/>
+          <p:nvPr/>
+        </p:nvSpPr>
+        <p:spPr>
+          <a:xfrm>
+            <a:off x="-1" y="0"/>
+            <a:ext cx="12193200" cy="432000"/>
+          </a:xfrm>
+          <a:prstGeom prst="rect">
+            <a:avLst/>
+          </a:prstGeom>
+          <a:solidFill>
+            <a:srgbClr val="FFC000"/>
+          </a:solidFill>
+          <a:ln>
+            <a:noFill/>
+          </a:ln>
+        </p:spPr>
+        <p:style>
+          <a:lnRef idx="2">
+            <a:schemeClr val="accent1">
+              <a:shade val="15000"/>
+            </a:schemeClr>
+          </a:lnRef>
+          <a:fillRef idx="1">
+            <a:schemeClr val="accent1"/>
+          </a:fillRef>
+          <a:effectRef idx="0">
+            <a:schemeClr val="accent1"/>
+          </a:effectRef>
+          <a:fontRef idx="minor">
+            <a:schemeClr val="lt1"/>
+          </a:fontRef>
+        </p:style>
+        <p:txBody>
+          <a:bodyPr rtlCol="0" anchor="ctr"/>
+          <a:lstStyle/>
+          <a:p>
+            <a:pPr algn="ctr"/>
+            <a:endParaRPr lang="ko-KR" altLang="en-US"/>
+          </a:p>
+        </p:txBody>
+      </p:sp>
+      <p:sp>
+        <p:nvSpPr>
+          <p:cNvPr id="4" name="사각형: 잘린 한쪽 모서리 3">
+            <a:extLst>
+              <a:ext uri="{FF2B5EF4-FFF2-40B4-BE49-F238E27FC236}">
+                <a16:creationId xmlns:a16="http://schemas.microsoft.com/office/drawing/2014/main" id="{6C29B8CC-D569-0884-2DE9-9DFCA7850BB2}"/>
+              </a:ext>
+            </a:extLst>
+          </p:cNvPr>
+          <p:cNvSpPr/>
+          <p:nvPr/>
+        </p:nvSpPr>
+        <p:spPr>
+          <a:xfrm>
+            <a:off x="-766" y="317921"/>
+            <a:ext cx="2880000" cy="775120"/>
+          </a:xfrm>
+          <a:prstGeom prst="snip1Rect">
+            <a:avLst/>
+          </a:prstGeom>
+          <a:solidFill>
+            <a:schemeClr val="bg1"/>
+          </a:solidFill>
+          <a:ln>
+            <a:noFill/>
+          </a:ln>
+        </p:spPr>
+        <p:style>
+          <a:lnRef idx="2">
+            <a:schemeClr val="accent1">
+              <a:shade val="15000"/>
+            </a:schemeClr>
+          </a:lnRef>
+          <a:fillRef idx="1">
+            <a:schemeClr val="accent1"/>
+          </a:fillRef>
+          <a:effectRef idx="0">
+            <a:schemeClr val="accent1"/>
+          </a:effectRef>
+          <a:fontRef idx="minor">
+            <a:schemeClr val="lt1"/>
+          </a:fontRef>
+        </p:style>
+        <p:txBody>
+          <a:bodyPr rtlCol="0" anchor="ctr"/>
+          <a:lstStyle/>
+          <a:p>
+            <a:pPr algn="ctr"/>
+            <a:endParaRPr lang="ko-KR" altLang="en-US" dirty="0"/>
+          </a:p>
+        </p:txBody>
+      </p:sp>
+      <p:sp>
+        <p:nvSpPr>
+          <p:cNvPr id="5" name="L 도형 4">
+            <a:extLst>
+              <a:ext uri="{FF2B5EF4-FFF2-40B4-BE49-F238E27FC236}">
+                <a16:creationId xmlns:a16="http://schemas.microsoft.com/office/drawing/2014/main" id="{4F9348AA-9546-4A2C-458A-3C5E0E7A8F87}"/>
+              </a:ext>
+            </a:extLst>
+          </p:cNvPr>
+          <p:cNvSpPr/>
+          <p:nvPr/>
+        </p:nvSpPr>
+        <p:spPr>
+          <a:xfrm rot="13500000">
+            <a:off x="11340286" y="125999"/>
+            <a:ext cx="180000" cy="180000"/>
+          </a:xfrm>
+          <a:prstGeom prst="corner">
+            <a:avLst/>
+          </a:prstGeom>
+          <a:solidFill>
+            <a:schemeClr val="bg1"/>
+          </a:solidFill>
+          <a:ln>
+            <a:noFill/>
+          </a:ln>
+        </p:spPr>
+        <p:style>
+          <a:lnRef idx="2">
+            <a:schemeClr val="accent1">
+              <a:shade val="15000"/>
+            </a:schemeClr>
+          </a:lnRef>
+          <a:fillRef idx="1">
+            <a:schemeClr val="accent1"/>
+          </a:fillRef>
+          <a:effectRef idx="0">
+            <a:schemeClr val="accent1"/>
+          </a:effectRef>
+          <a:fontRef idx="minor">
+            <a:schemeClr val="lt1"/>
+          </a:fontRef>
+        </p:style>
+        <p:txBody>
+          <a:bodyPr rtlCol="0" anchor="ctr"/>
+          <a:lstStyle/>
+          <a:p>
+            <a:pPr algn="ctr"/>
+            <a:endParaRPr lang="ko-KR" altLang="en-US" dirty="0"/>
+          </a:p>
+        </p:txBody>
+      </p:sp>
+      <p:sp>
+        <p:nvSpPr>
+          <p:cNvPr id="6" name="L 도형 5">
+            <a:extLst>
+              <a:ext uri="{FF2B5EF4-FFF2-40B4-BE49-F238E27FC236}">
+                <a16:creationId xmlns:a16="http://schemas.microsoft.com/office/drawing/2014/main" id="{CD0274B5-2FBB-CCC2-3FDF-6B688797683C}"/>
+              </a:ext>
+            </a:extLst>
+          </p:cNvPr>
+          <p:cNvSpPr/>
+          <p:nvPr/>
+        </p:nvSpPr>
+        <p:spPr>
+          <a:xfrm rot="13500000">
+            <a:off x="11595610" y="123995"/>
+            <a:ext cx="180000" cy="180000"/>
+          </a:xfrm>
+          <a:prstGeom prst="corner">
+            <a:avLst/>
+          </a:prstGeom>
+          <a:solidFill>
+            <a:schemeClr val="bg1"/>
+          </a:solidFill>
+          <a:ln>
+            <a:noFill/>
+          </a:ln>
+        </p:spPr>
+        <p:style>
+          <a:lnRef idx="2">
+            <a:schemeClr val="accent1">
+              <a:shade val="15000"/>
+            </a:schemeClr>
+          </a:lnRef>
+          <a:fillRef idx="1">
+            <a:schemeClr val="accent1"/>
+          </a:fillRef>
+          <a:effectRef idx="0">
+            <a:schemeClr val="accent1"/>
+          </a:effectRef>
+          <a:fontRef idx="minor">
+            <a:schemeClr val="lt1"/>
+          </a:fontRef>
+        </p:style>
+        <p:txBody>
+          <a:bodyPr rtlCol="0" anchor="ctr"/>
+          <a:lstStyle/>
+          <a:p>
+            <a:pPr algn="ctr"/>
+            <a:endParaRPr lang="ko-KR" altLang="en-US" dirty="0"/>
+          </a:p>
+        </p:txBody>
+      </p:sp>
+      <p:sp>
+        <p:nvSpPr>
+          <p:cNvPr id="7" name="L 도형 6">
+            <a:extLst>
+              <a:ext uri="{FF2B5EF4-FFF2-40B4-BE49-F238E27FC236}">
+                <a16:creationId xmlns:a16="http://schemas.microsoft.com/office/drawing/2014/main" id="{F55AB5B5-649B-F4D3-54AC-E78424F260C5}"/>
+              </a:ext>
+            </a:extLst>
+          </p:cNvPr>
+          <p:cNvSpPr/>
+          <p:nvPr/>
+        </p:nvSpPr>
+        <p:spPr>
+          <a:xfrm rot="13500000">
+            <a:off x="11849405" y="126000"/>
+            <a:ext cx="180000" cy="180000"/>
+          </a:xfrm>
+          <a:prstGeom prst="corner">
+            <a:avLst/>
+          </a:prstGeom>
+          <a:solidFill>
+            <a:schemeClr val="bg1"/>
+          </a:solidFill>
+          <a:ln>
+            <a:noFill/>
+          </a:ln>
+        </p:spPr>
+        <p:style>
+          <a:lnRef idx="2">
+            <a:schemeClr val="accent1">
+              <a:shade val="15000"/>
+            </a:schemeClr>
+          </a:lnRef>
+          <a:fillRef idx="1">
+            <a:schemeClr val="accent1"/>
+          </a:fillRef>
+          <a:effectRef idx="0">
+            <a:schemeClr val="accent1"/>
+          </a:effectRef>
+          <a:fontRef idx="minor">
+            <a:schemeClr val="lt1"/>
+          </a:fontRef>
+        </p:style>
+        <p:txBody>
+          <a:bodyPr rtlCol="0" anchor="ctr"/>
+          <a:lstStyle/>
+          <a:p>
+            <a:pPr algn="ctr"/>
+            <a:endParaRPr lang="ko-KR" altLang="en-US" dirty="0"/>
+          </a:p>
+        </p:txBody>
+      </p:sp>
+      <p:sp>
+        <p:nvSpPr>
+          <p:cNvPr id="9" name="직사각형 8">
+            <a:extLst>
+              <a:ext uri="{FF2B5EF4-FFF2-40B4-BE49-F238E27FC236}">
+                <a16:creationId xmlns:a16="http://schemas.microsoft.com/office/drawing/2014/main" id="{3F27DF61-677C-F35A-C9F2-52DBB017AE96}"/>
+              </a:ext>
+            </a:extLst>
+          </p:cNvPr>
+          <p:cNvSpPr/>
+          <p:nvPr/>
+        </p:nvSpPr>
+        <p:spPr>
+          <a:xfrm>
+            <a:off x="-766" y="1059394"/>
+            <a:ext cx="2880000" cy="18000"/>
+          </a:xfrm>
+          <a:prstGeom prst="rect">
+            <a:avLst/>
+          </a:prstGeom>
+          <a:solidFill>
+            <a:schemeClr val="bg2"/>
+          </a:solidFill>
+          <a:ln>
+            <a:noFill/>
+          </a:ln>
+        </p:spPr>
+        <p:style>
+          <a:lnRef idx="2">
+            <a:schemeClr val="accent1">
+              <a:shade val="15000"/>
+            </a:schemeClr>
+          </a:lnRef>
+          <a:fillRef idx="1">
+            <a:schemeClr val="accent1"/>
+          </a:fillRef>
+          <a:effectRef idx="0">
+            <a:schemeClr val="accent1"/>
+          </a:effectRef>
+          <a:fontRef idx="minor">
+            <a:schemeClr val="lt1"/>
+          </a:fontRef>
+        </p:style>
+        <p:txBody>
+          <a:bodyPr rtlCol="0" anchor="ctr"/>
+          <a:lstStyle/>
+          <a:p>
+            <a:pPr algn="ctr"/>
+            <a:endParaRPr lang="ko-KR" altLang="en-US"/>
+          </a:p>
+        </p:txBody>
+      </p:sp>
+      <p:sp>
+        <p:nvSpPr>
+          <p:cNvPr id="10" name="직사각형 9">
+            <a:extLst>
+              <a:ext uri="{FF2B5EF4-FFF2-40B4-BE49-F238E27FC236}">
+                <a16:creationId xmlns:a16="http://schemas.microsoft.com/office/drawing/2014/main" id="{BB74B0A1-2171-CBBC-C714-22F54AD41B9A}"/>
+              </a:ext>
+            </a:extLst>
+          </p:cNvPr>
+          <p:cNvSpPr/>
+          <p:nvPr/>
+        </p:nvSpPr>
+        <p:spPr>
+          <a:xfrm>
+            <a:off x="2771234" y="1068394"/>
+            <a:ext cx="108000" cy="108000"/>
+          </a:xfrm>
+          <a:prstGeom prst="rect">
+            <a:avLst/>
+          </a:prstGeom>
+          <a:solidFill>
+            <a:schemeClr val="bg2"/>
+          </a:solidFill>
+          <a:ln>
+            <a:noFill/>
+          </a:ln>
+        </p:spPr>
+        <p:style>
+          <a:lnRef idx="2">
+            <a:schemeClr val="accent1">
+              <a:shade val="15000"/>
+            </a:schemeClr>
+          </a:lnRef>
+          <a:fillRef idx="1">
+            <a:schemeClr val="accent1"/>
+          </a:fillRef>
+          <a:effectRef idx="0">
+            <a:schemeClr val="accent1"/>
+          </a:effectRef>
+          <a:fontRef idx="minor">
+            <a:schemeClr val="lt1"/>
+          </a:fontRef>
+        </p:style>
+        <p:txBody>
+          <a:bodyPr rtlCol="0" anchor="ctr"/>
+          <a:lstStyle/>
+          <a:p>
+            <a:pPr algn="ctr"/>
+            <a:endParaRPr lang="ko-KR" altLang="en-US" dirty="0"/>
+          </a:p>
+        </p:txBody>
+      </p:sp>
+      <p:sp>
+        <p:nvSpPr>
+          <p:cNvPr id="11" name="제목 1">
+            <a:extLst>
+              <a:ext uri="{FF2B5EF4-FFF2-40B4-BE49-F238E27FC236}">
+                <a16:creationId xmlns:a16="http://schemas.microsoft.com/office/drawing/2014/main" id="{67BCF6BD-0DE3-693F-558E-46D224F3BF53}"/>
+              </a:ext>
+            </a:extLst>
+          </p:cNvPr>
+          <p:cNvSpPr txBox="1">
+            <a:spLocks/>
+          </p:cNvSpPr>
+          <p:nvPr/>
+        </p:nvSpPr>
+        <p:spPr>
+          <a:xfrm>
+            <a:off x="-63341" y="341275"/>
+            <a:ext cx="5101624" cy="1289849"/>
+          </a:xfrm>
+          <a:prstGeom prst="rect">
+            <a:avLst/>
+          </a:prstGeom>
+        </p:spPr>
+        <p:txBody>
+          <a:bodyPr/>
+          <a:lstStyle>
+            <a:lvl1pPr algn="l" defTabSz="914400" rtl="0" eaLnBrk="1" latinLnBrk="1" hangingPunct="1">
+              <a:lnSpc>
+                <a:spcPct val="90000"/>
+              </a:lnSpc>
+              <a:spcBef>
+                <a:spcPct val="0"/>
+              </a:spcBef>
+              <a:buNone/>
+              <a:defRPr sz="4400" kern="1200">
+                <a:solidFill>
+                  <a:schemeClr val="tx1"/>
+                </a:solidFill>
+                <a:latin typeface="+mj-lt"/>
+                <a:ea typeface="+mj-ea"/>
+                <a:cs typeface="+mj-cs"/>
+              </a:defRPr>
+            </a:lvl1pPr>
+          </a:lstStyle>
+          <a:p>
+            <a:r>
+              <a:rPr lang="ko-KR" altLang="en-US" b="1" dirty="0">
+                <a:latin typeface="Noto Sans KR" panose="020B0200000000000000" pitchFamily="50" charset="-127"/>
+                <a:ea typeface="Noto Sans KR" panose="020B0200000000000000" pitchFamily="50" charset="-127"/>
+              </a:rPr>
+              <a:t>   </a:t>
+            </a:r>
+            <a:r>
+              <a:rPr lang="ko-KR" altLang="en-US" sz="3600" b="1" dirty="0">
+                <a:latin typeface="Noto Sans KR Black" panose="020B0200000000000000" pitchFamily="50" charset="-127"/>
+                <a:ea typeface="Noto Sans KR Black" panose="020B0200000000000000" pitchFamily="50" charset="-127"/>
+              </a:rPr>
+              <a:t>화면설계서</a:t>
+            </a:r>
+            <a:endParaRPr lang="ko-KR" altLang="en-US" sz="3600" dirty="0">
+              <a:latin typeface="Noto Sans KR Black" panose="020B0200000000000000" pitchFamily="50" charset="-127"/>
+              <a:ea typeface="Noto Sans KR Black" panose="020B0200000000000000" pitchFamily="50" charset="-127"/>
+            </a:endParaRPr>
+          </a:p>
+        </p:txBody>
+      </p:sp>
+    </p:spTree>
+    <p:extLst>
+      <p:ext uri="{BB962C8B-B14F-4D97-AF65-F5344CB8AC3E}">
+        <p14:creationId xmlns:p14="http://schemas.microsoft.com/office/powerpoint/2010/main" val="808389712"/>
+      </p:ext>
+    </p:extLst>
+  </p:cSld>
+  <p:clrMapOvr>
+    <a:masterClrMapping/>
+  </p:clrMapOvr>
+</p:sld>
+</file>
+
+<file path=ppt/slides/slide13.xml><?xml version="1.0" encoding="utf-8"?>
+<p:sld xmlns:a="http://schemas.openxmlformats.org/drawingml/2006/main" xmlns:r="http://schemas.openxmlformats.org/officeDocument/2006/relationships" xmlns:p="http://schemas.openxmlformats.org/presentationml/2006/main">
+  <p:cSld>
+    <p:spTree>
+      <p:nvGrpSpPr>
+        <p:cNvPr id="1" name=""/>
+        <p:cNvGrpSpPr/>
+        <p:nvPr/>
+      </p:nvGrpSpPr>
+      <p:grpSpPr>
+        <a:xfrm>
+          <a:off x="0" y="0"/>
+          <a:ext cx="0" cy="0"/>
+          <a:chOff x="0" y="0"/>
+          <a:chExt cx="0" cy="0"/>
+        </a:xfrm>
+      </p:grpSpPr>
+      <p:pic>
+        <p:nvPicPr>
+          <p:cNvPr id="8" name="그림 7" descr="텍스트, 스크린샷, 번호, 도표이(가) 표시된 사진&#10;&#10;AI가 생성한 콘텐츠는 부정확할 수 있습니다.">
+            <a:extLst>
+              <a:ext uri="{FF2B5EF4-FFF2-40B4-BE49-F238E27FC236}">
+                <a16:creationId xmlns:a16="http://schemas.microsoft.com/office/drawing/2014/main" id="{6E2B830A-0F6B-D0A2-2834-9C32BDCEC0A2}"/>
+              </a:ext>
+            </a:extLst>
+          </p:cNvPr>
+          <p:cNvPicPr>
+            <a:picLocks noChangeAspect="1"/>
+          </p:cNvPicPr>
+          <p:nvPr/>
+        </p:nvPicPr>
+        <p:blipFill>
+          <a:blip r:embed="rId2">
+            <a:extLst>
+              <a:ext uri="{28A0092B-C50C-407E-A947-70E740481C1C}">
+                <a14:useLocalDpi xmlns:a14="http://schemas.microsoft.com/office/drawing/2010/main" val="0"/>
+              </a:ext>
+            </a:extLst>
+          </a:blip>
+          <a:stretch>
+            <a:fillRect/>
+          </a:stretch>
+        </p:blipFill>
+        <p:spPr>
+          <a:xfrm>
+            <a:off x="972000" y="1008000"/>
+            <a:ext cx="10364647" cy="5830113"/>
+          </a:xfrm>
+          <a:prstGeom prst="rect">
+            <a:avLst/>
+          </a:prstGeom>
+        </p:spPr>
+      </p:pic>
+      <p:sp>
+        <p:nvSpPr>
+          <p:cNvPr id="3" name="직사각형 2">
+            <a:extLst>
+              <a:ext uri="{FF2B5EF4-FFF2-40B4-BE49-F238E27FC236}">
+                <a16:creationId xmlns:a16="http://schemas.microsoft.com/office/drawing/2014/main" id="{A1BC658B-3A71-2467-CB33-03A51800EBDC}"/>
+              </a:ext>
+            </a:extLst>
+          </p:cNvPr>
+          <p:cNvSpPr/>
+          <p:nvPr/>
+        </p:nvSpPr>
+        <p:spPr>
+          <a:xfrm>
+            <a:off x="-1" y="0"/>
+            <a:ext cx="12193200" cy="432000"/>
+          </a:xfrm>
+          <a:prstGeom prst="rect">
+            <a:avLst/>
+          </a:prstGeom>
+          <a:solidFill>
+            <a:srgbClr val="FFC000"/>
+          </a:solidFill>
+          <a:ln>
+            <a:noFill/>
+          </a:ln>
+        </p:spPr>
+        <p:style>
+          <a:lnRef idx="2">
+            <a:schemeClr val="accent1">
+              <a:shade val="15000"/>
+            </a:schemeClr>
+          </a:lnRef>
+          <a:fillRef idx="1">
+            <a:schemeClr val="accent1"/>
+          </a:fillRef>
+          <a:effectRef idx="0">
+            <a:schemeClr val="accent1"/>
+          </a:effectRef>
+          <a:fontRef idx="minor">
+            <a:schemeClr val="lt1"/>
+          </a:fontRef>
+        </p:style>
+        <p:txBody>
+          <a:bodyPr rtlCol="0" anchor="ctr"/>
+          <a:lstStyle/>
+          <a:p>
+            <a:pPr algn="ctr"/>
+            <a:endParaRPr lang="ko-KR" altLang="en-US"/>
+          </a:p>
+        </p:txBody>
+      </p:sp>
+      <p:sp>
+        <p:nvSpPr>
+          <p:cNvPr id="4" name="사각형: 잘린 한쪽 모서리 3">
+            <a:extLst>
+              <a:ext uri="{FF2B5EF4-FFF2-40B4-BE49-F238E27FC236}">
+                <a16:creationId xmlns:a16="http://schemas.microsoft.com/office/drawing/2014/main" id="{6C29B8CC-D569-0884-2DE9-9DFCA7850BB2}"/>
+              </a:ext>
+            </a:extLst>
+          </p:cNvPr>
+          <p:cNvSpPr/>
+          <p:nvPr/>
+        </p:nvSpPr>
+        <p:spPr>
+          <a:xfrm>
+            <a:off x="-766" y="317921"/>
+            <a:ext cx="2880000" cy="775120"/>
+          </a:xfrm>
+          <a:prstGeom prst="snip1Rect">
+            <a:avLst/>
+          </a:prstGeom>
+          <a:solidFill>
+            <a:schemeClr val="bg1"/>
+          </a:solidFill>
+          <a:ln>
+            <a:noFill/>
+          </a:ln>
+        </p:spPr>
+        <p:style>
+          <a:lnRef idx="2">
+            <a:schemeClr val="accent1">
+              <a:shade val="15000"/>
+            </a:schemeClr>
+          </a:lnRef>
+          <a:fillRef idx="1">
+            <a:schemeClr val="accent1"/>
+          </a:fillRef>
+          <a:effectRef idx="0">
+            <a:schemeClr val="accent1"/>
+          </a:effectRef>
+          <a:fontRef idx="minor">
+            <a:schemeClr val="lt1"/>
+          </a:fontRef>
+        </p:style>
+        <p:txBody>
+          <a:bodyPr rtlCol="0" anchor="ctr"/>
+          <a:lstStyle/>
+          <a:p>
+            <a:pPr algn="ctr"/>
+            <a:endParaRPr lang="ko-KR" altLang="en-US" dirty="0"/>
+          </a:p>
+        </p:txBody>
+      </p:sp>
+      <p:sp>
+        <p:nvSpPr>
+          <p:cNvPr id="5" name="L 도형 4">
+            <a:extLst>
+              <a:ext uri="{FF2B5EF4-FFF2-40B4-BE49-F238E27FC236}">
+                <a16:creationId xmlns:a16="http://schemas.microsoft.com/office/drawing/2014/main" id="{4F9348AA-9546-4A2C-458A-3C5E0E7A8F87}"/>
+              </a:ext>
+            </a:extLst>
+          </p:cNvPr>
+          <p:cNvSpPr/>
+          <p:nvPr/>
+        </p:nvSpPr>
+        <p:spPr>
+          <a:xfrm rot="13500000">
+            <a:off x="11340286" y="125999"/>
+            <a:ext cx="180000" cy="180000"/>
+          </a:xfrm>
+          <a:prstGeom prst="corner">
+            <a:avLst/>
+          </a:prstGeom>
+          <a:solidFill>
+            <a:schemeClr val="bg1"/>
+          </a:solidFill>
+          <a:ln>
+            <a:noFill/>
+          </a:ln>
+        </p:spPr>
+        <p:style>
+          <a:lnRef idx="2">
+            <a:schemeClr val="accent1">
+              <a:shade val="15000"/>
+            </a:schemeClr>
+          </a:lnRef>
+          <a:fillRef idx="1">
+            <a:schemeClr val="accent1"/>
+          </a:fillRef>
+          <a:effectRef idx="0">
+            <a:schemeClr val="accent1"/>
+          </a:effectRef>
+          <a:fontRef idx="minor">
+            <a:schemeClr val="lt1"/>
+          </a:fontRef>
+        </p:style>
+        <p:txBody>
+          <a:bodyPr rtlCol="0" anchor="ctr"/>
+          <a:lstStyle/>
+          <a:p>
+            <a:pPr algn="ctr"/>
+            <a:endParaRPr lang="ko-KR" altLang="en-US" dirty="0"/>
+          </a:p>
+        </p:txBody>
+      </p:sp>
+      <p:sp>
+        <p:nvSpPr>
+          <p:cNvPr id="6" name="L 도형 5">
+            <a:extLst>
+              <a:ext uri="{FF2B5EF4-FFF2-40B4-BE49-F238E27FC236}">
+                <a16:creationId xmlns:a16="http://schemas.microsoft.com/office/drawing/2014/main" id="{CD0274B5-2FBB-CCC2-3FDF-6B688797683C}"/>
+              </a:ext>
+            </a:extLst>
+          </p:cNvPr>
+          <p:cNvSpPr/>
+          <p:nvPr/>
+        </p:nvSpPr>
+        <p:spPr>
+          <a:xfrm rot="13500000">
+            <a:off x="11595610" y="123995"/>
+            <a:ext cx="180000" cy="180000"/>
+          </a:xfrm>
+          <a:prstGeom prst="corner">
+            <a:avLst/>
+          </a:prstGeom>
+          <a:solidFill>
+            <a:schemeClr val="bg1"/>
+          </a:solidFill>
+          <a:ln>
+            <a:noFill/>
+          </a:ln>
+        </p:spPr>
+        <p:style>
+          <a:lnRef idx="2">
+            <a:schemeClr val="accent1">
+              <a:shade val="15000"/>
+            </a:schemeClr>
+          </a:lnRef>
+          <a:fillRef idx="1">
+            <a:schemeClr val="accent1"/>
+          </a:fillRef>
+          <a:effectRef idx="0">
+            <a:schemeClr val="accent1"/>
+          </a:effectRef>
+          <a:fontRef idx="minor">
+            <a:schemeClr val="lt1"/>
+          </a:fontRef>
+        </p:style>
+        <p:txBody>
+          <a:bodyPr rtlCol="0" anchor="ctr"/>
+          <a:lstStyle/>
+          <a:p>
+            <a:pPr algn="ctr"/>
+            <a:endParaRPr lang="ko-KR" altLang="en-US" dirty="0"/>
+          </a:p>
+        </p:txBody>
+      </p:sp>
+      <p:sp>
+        <p:nvSpPr>
+          <p:cNvPr id="7" name="L 도형 6">
+            <a:extLst>
+              <a:ext uri="{FF2B5EF4-FFF2-40B4-BE49-F238E27FC236}">
+                <a16:creationId xmlns:a16="http://schemas.microsoft.com/office/drawing/2014/main" id="{F55AB5B5-649B-F4D3-54AC-E78424F260C5}"/>
+              </a:ext>
+            </a:extLst>
+          </p:cNvPr>
+          <p:cNvSpPr/>
+          <p:nvPr/>
+        </p:nvSpPr>
+        <p:spPr>
+          <a:xfrm rot="13500000">
+            <a:off x="11849405" y="126000"/>
+            <a:ext cx="180000" cy="180000"/>
+          </a:xfrm>
+          <a:prstGeom prst="corner">
+            <a:avLst/>
+          </a:prstGeom>
+          <a:solidFill>
+            <a:schemeClr val="bg1"/>
+          </a:solidFill>
+          <a:ln>
+            <a:noFill/>
+          </a:ln>
+        </p:spPr>
+        <p:style>
+          <a:lnRef idx="2">
+            <a:schemeClr val="accent1">
+              <a:shade val="15000"/>
+            </a:schemeClr>
+          </a:lnRef>
+          <a:fillRef idx="1">
+            <a:schemeClr val="accent1"/>
+          </a:fillRef>
+          <a:effectRef idx="0">
+            <a:schemeClr val="accent1"/>
+          </a:effectRef>
+          <a:fontRef idx="minor">
+            <a:schemeClr val="lt1"/>
+          </a:fontRef>
+        </p:style>
+        <p:txBody>
+          <a:bodyPr rtlCol="0" anchor="ctr"/>
+          <a:lstStyle/>
+          <a:p>
+            <a:pPr algn="ctr"/>
+            <a:endParaRPr lang="ko-KR" altLang="en-US" dirty="0"/>
+          </a:p>
+        </p:txBody>
+      </p:sp>
+      <p:sp>
+        <p:nvSpPr>
+          <p:cNvPr id="9" name="직사각형 8">
+            <a:extLst>
+              <a:ext uri="{FF2B5EF4-FFF2-40B4-BE49-F238E27FC236}">
+                <a16:creationId xmlns:a16="http://schemas.microsoft.com/office/drawing/2014/main" id="{3F27DF61-677C-F35A-C9F2-52DBB017AE96}"/>
+              </a:ext>
+            </a:extLst>
+          </p:cNvPr>
+          <p:cNvSpPr/>
+          <p:nvPr/>
+        </p:nvSpPr>
+        <p:spPr>
+          <a:xfrm>
+            <a:off x="-766" y="1059394"/>
+            <a:ext cx="2880000" cy="18000"/>
+          </a:xfrm>
+          <a:prstGeom prst="rect">
+            <a:avLst/>
+          </a:prstGeom>
+          <a:solidFill>
+            <a:schemeClr val="bg2"/>
+          </a:solidFill>
+          <a:ln>
+            <a:noFill/>
+          </a:ln>
+        </p:spPr>
+        <p:style>
+          <a:lnRef idx="2">
+            <a:schemeClr val="accent1">
+              <a:shade val="15000"/>
+            </a:schemeClr>
+          </a:lnRef>
+          <a:fillRef idx="1">
+            <a:schemeClr val="accent1"/>
+          </a:fillRef>
+          <a:effectRef idx="0">
+            <a:schemeClr val="accent1"/>
+          </a:effectRef>
+          <a:fontRef idx="minor">
+            <a:schemeClr val="lt1"/>
+          </a:fontRef>
+        </p:style>
+        <p:txBody>
+          <a:bodyPr rtlCol="0" anchor="ctr"/>
+          <a:lstStyle/>
+          <a:p>
+            <a:pPr algn="ctr"/>
+            <a:endParaRPr lang="ko-KR" altLang="en-US"/>
+          </a:p>
+        </p:txBody>
+      </p:sp>
+      <p:sp>
+        <p:nvSpPr>
+          <p:cNvPr id="10" name="직사각형 9">
+            <a:extLst>
+              <a:ext uri="{FF2B5EF4-FFF2-40B4-BE49-F238E27FC236}">
+                <a16:creationId xmlns:a16="http://schemas.microsoft.com/office/drawing/2014/main" id="{BB74B0A1-2171-CBBC-C714-22F54AD41B9A}"/>
+              </a:ext>
+            </a:extLst>
+          </p:cNvPr>
+          <p:cNvSpPr/>
+          <p:nvPr/>
+        </p:nvSpPr>
+        <p:spPr>
+          <a:xfrm>
+            <a:off x="2771234" y="1068394"/>
+            <a:ext cx="108000" cy="108000"/>
+          </a:xfrm>
+          <a:prstGeom prst="rect">
+            <a:avLst/>
+          </a:prstGeom>
+          <a:solidFill>
+            <a:schemeClr val="bg2"/>
+          </a:solidFill>
+          <a:ln>
+            <a:noFill/>
+          </a:ln>
+        </p:spPr>
+        <p:style>
+          <a:lnRef idx="2">
+            <a:schemeClr val="accent1">
+              <a:shade val="15000"/>
+            </a:schemeClr>
+          </a:lnRef>
+          <a:fillRef idx="1">
+            <a:schemeClr val="accent1"/>
+          </a:fillRef>
+          <a:effectRef idx="0">
+            <a:schemeClr val="accent1"/>
+          </a:effectRef>
+          <a:fontRef idx="minor">
+            <a:schemeClr val="lt1"/>
+          </a:fontRef>
+        </p:style>
+        <p:txBody>
+          <a:bodyPr rtlCol="0" anchor="ctr"/>
+          <a:lstStyle/>
+          <a:p>
+            <a:pPr algn="ctr"/>
+            <a:endParaRPr lang="ko-KR" altLang="en-US" dirty="0"/>
+          </a:p>
+        </p:txBody>
+      </p:sp>
+      <p:sp>
+        <p:nvSpPr>
+          <p:cNvPr id="11" name="제목 1">
+            <a:extLst>
+              <a:ext uri="{FF2B5EF4-FFF2-40B4-BE49-F238E27FC236}">
+                <a16:creationId xmlns:a16="http://schemas.microsoft.com/office/drawing/2014/main" id="{67BCF6BD-0DE3-693F-558E-46D224F3BF53}"/>
+              </a:ext>
+            </a:extLst>
+          </p:cNvPr>
+          <p:cNvSpPr txBox="1">
+            <a:spLocks/>
+          </p:cNvSpPr>
+          <p:nvPr/>
+        </p:nvSpPr>
+        <p:spPr>
+          <a:xfrm>
+            <a:off x="-63341" y="341275"/>
+            <a:ext cx="5101624" cy="1289849"/>
+          </a:xfrm>
+          <a:prstGeom prst="rect">
+            <a:avLst/>
+          </a:prstGeom>
+        </p:spPr>
+        <p:txBody>
+          <a:bodyPr/>
+          <a:lstStyle>
+            <a:lvl1pPr algn="l" defTabSz="914400" rtl="0" eaLnBrk="1" latinLnBrk="1" hangingPunct="1">
+              <a:lnSpc>
+                <a:spcPct val="90000"/>
+              </a:lnSpc>
+              <a:spcBef>
+                <a:spcPct val="0"/>
+              </a:spcBef>
+              <a:buNone/>
+              <a:defRPr sz="4400" kern="1200">
+                <a:solidFill>
+                  <a:schemeClr val="tx1"/>
+                </a:solidFill>
+                <a:latin typeface="+mj-lt"/>
+                <a:ea typeface="+mj-ea"/>
+                <a:cs typeface="+mj-cs"/>
+              </a:defRPr>
+            </a:lvl1pPr>
+          </a:lstStyle>
+          <a:p>
+            <a:r>
+              <a:rPr lang="ko-KR" altLang="en-US" b="1" dirty="0">
+                <a:latin typeface="Noto Sans KR" panose="020B0200000000000000" pitchFamily="50" charset="-127"/>
+                <a:ea typeface="Noto Sans KR" panose="020B0200000000000000" pitchFamily="50" charset="-127"/>
+              </a:rPr>
+              <a:t>   </a:t>
+            </a:r>
+            <a:r>
+              <a:rPr lang="ko-KR" altLang="en-US" sz="3600" b="1" dirty="0">
+                <a:latin typeface="Noto Sans KR Black" panose="020B0200000000000000" pitchFamily="50" charset="-127"/>
+                <a:ea typeface="Noto Sans KR Black" panose="020B0200000000000000" pitchFamily="50" charset="-127"/>
+              </a:rPr>
+              <a:t>화면설계서</a:t>
+            </a:r>
+            <a:endParaRPr lang="ko-KR" altLang="en-US" sz="3600" dirty="0">
+              <a:latin typeface="Noto Sans KR Black" panose="020B0200000000000000" pitchFamily="50" charset="-127"/>
+              <a:ea typeface="Noto Sans KR Black" panose="020B0200000000000000" pitchFamily="50" charset="-127"/>
+            </a:endParaRPr>
+          </a:p>
+        </p:txBody>
+      </p:sp>
+    </p:spTree>
+    <p:extLst>
+      <p:ext uri="{BB962C8B-B14F-4D97-AF65-F5344CB8AC3E}">
+        <p14:creationId xmlns:p14="http://schemas.microsoft.com/office/powerpoint/2010/main" val="389012500"/>
+      </p:ext>
+    </p:extLst>
+  </p:cSld>
+  <p:clrMapOvr>
+    <a:masterClrMapping/>
+  </p:clrMapOvr>
+</p:sld>
+</file>
+
+<file path=ppt/slides/slide14.xml><?xml version="1.0" encoding="utf-8"?>
+<p:sld xmlns:a="http://schemas.openxmlformats.org/drawingml/2006/main" xmlns:r="http://schemas.openxmlformats.org/officeDocument/2006/relationships" xmlns:p="http://schemas.openxmlformats.org/presentationml/2006/main">
+  <p:cSld>
+    <p:spTree>
+      <p:nvGrpSpPr>
+        <p:cNvPr id="1" name=""/>
+        <p:cNvGrpSpPr/>
+        <p:nvPr/>
+      </p:nvGrpSpPr>
+      <p:grpSpPr>
+        <a:xfrm>
+          <a:off x="0" y="0"/>
+          <a:ext cx="0" cy="0"/>
+          <a:chOff x="0" y="0"/>
+          <a:chExt cx="0" cy="0"/>
+        </a:xfrm>
+      </p:grpSpPr>
+      <p:pic>
+        <p:nvPicPr>
+          <p:cNvPr id="8" name="그림 7" descr="텍스트, 스크린샷, 도표, 번호이(가) 표시된 사진&#10;&#10;AI가 생성한 콘텐츠는 부정확할 수 있습니다.">
+            <a:extLst>
+              <a:ext uri="{FF2B5EF4-FFF2-40B4-BE49-F238E27FC236}">
+                <a16:creationId xmlns:a16="http://schemas.microsoft.com/office/drawing/2014/main" id="{4A0B29F1-CB3D-85A0-B066-D252A6501F0E}"/>
+              </a:ext>
+            </a:extLst>
+          </p:cNvPr>
+          <p:cNvPicPr>
+            <a:picLocks noChangeAspect="1"/>
+          </p:cNvPicPr>
+          <p:nvPr/>
+        </p:nvPicPr>
+        <p:blipFill>
+          <a:blip r:embed="rId2">
+            <a:extLst>
+              <a:ext uri="{28A0092B-C50C-407E-A947-70E740481C1C}">
+                <a14:useLocalDpi xmlns:a14="http://schemas.microsoft.com/office/drawing/2010/main" val="0"/>
+              </a:ext>
+            </a:extLst>
+          </a:blip>
+          <a:stretch>
+            <a:fillRect/>
+          </a:stretch>
+        </p:blipFill>
+        <p:spPr>
+          <a:xfrm>
+            <a:off x="972000" y="1008000"/>
+            <a:ext cx="10364647" cy="5830113"/>
+          </a:xfrm>
+          <a:prstGeom prst="rect">
+            <a:avLst/>
+          </a:prstGeom>
+        </p:spPr>
+      </p:pic>
+      <p:sp>
+        <p:nvSpPr>
+          <p:cNvPr id="3" name="직사각형 2">
+            <a:extLst>
+              <a:ext uri="{FF2B5EF4-FFF2-40B4-BE49-F238E27FC236}">
+                <a16:creationId xmlns:a16="http://schemas.microsoft.com/office/drawing/2014/main" id="{A1BC658B-3A71-2467-CB33-03A51800EBDC}"/>
+              </a:ext>
+            </a:extLst>
+          </p:cNvPr>
+          <p:cNvSpPr/>
+          <p:nvPr/>
+        </p:nvSpPr>
+        <p:spPr>
+          <a:xfrm>
+            <a:off x="-1" y="0"/>
+            <a:ext cx="12193200" cy="432000"/>
+          </a:xfrm>
+          <a:prstGeom prst="rect">
+            <a:avLst/>
+          </a:prstGeom>
+          <a:solidFill>
+            <a:srgbClr val="FFC000"/>
+          </a:solidFill>
+          <a:ln>
+            <a:noFill/>
+          </a:ln>
+        </p:spPr>
+        <p:style>
+          <a:lnRef idx="2">
+            <a:schemeClr val="accent1">
+              <a:shade val="15000"/>
+            </a:schemeClr>
+          </a:lnRef>
+          <a:fillRef idx="1">
+            <a:schemeClr val="accent1"/>
+          </a:fillRef>
+          <a:effectRef idx="0">
+            <a:schemeClr val="accent1"/>
+          </a:effectRef>
+          <a:fontRef idx="minor">
+            <a:schemeClr val="lt1"/>
+          </a:fontRef>
+        </p:style>
+        <p:txBody>
+          <a:bodyPr rtlCol="0" anchor="ctr"/>
+          <a:lstStyle/>
+          <a:p>
+            <a:pPr algn="ctr"/>
+            <a:endParaRPr lang="ko-KR" altLang="en-US"/>
+          </a:p>
+        </p:txBody>
+      </p:sp>
+      <p:sp>
+        <p:nvSpPr>
+          <p:cNvPr id="4" name="사각형: 잘린 한쪽 모서리 3">
+            <a:extLst>
+              <a:ext uri="{FF2B5EF4-FFF2-40B4-BE49-F238E27FC236}">
+                <a16:creationId xmlns:a16="http://schemas.microsoft.com/office/drawing/2014/main" id="{6C29B8CC-D569-0884-2DE9-9DFCA7850BB2}"/>
+              </a:ext>
+            </a:extLst>
+          </p:cNvPr>
+          <p:cNvSpPr/>
+          <p:nvPr/>
+        </p:nvSpPr>
+        <p:spPr>
+          <a:xfrm>
+            <a:off x="-766" y="317921"/>
+            <a:ext cx="2880000" cy="775120"/>
+          </a:xfrm>
+          <a:prstGeom prst="snip1Rect">
+            <a:avLst/>
+          </a:prstGeom>
+          <a:solidFill>
+            <a:schemeClr val="bg1"/>
+          </a:solidFill>
+          <a:ln>
+            <a:noFill/>
+          </a:ln>
+        </p:spPr>
+        <p:style>
+          <a:lnRef idx="2">
+            <a:schemeClr val="accent1">
+              <a:shade val="15000"/>
+            </a:schemeClr>
+          </a:lnRef>
+          <a:fillRef idx="1">
+            <a:schemeClr val="accent1"/>
+          </a:fillRef>
+          <a:effectRef idx="0">
+            <a:schemeClr val="accent1"/>
+          </a:effectRef>
+          <a:fontRef idx="minor">
+            <a:schemeClr val="lt1"/>
+          </a:fontRef>
+        </p:style>
+        <p:txBody>
+          <a:bodyPr rtlCol="0" anchor="ctr"/>
+          <a:lstStyle/>
+          <a:p>
+            <a:pPr algn="ctr"/>
+            <a:endParaRPr lang="ko-KR" altLang="en-US" dirty="0"/>
+          </a:p>
+        </p:txBody>
+      </p:sp>
+      <p:sp>
+        <p:nvSpPr>
+          <p:cNvPr id="5" name="L 도형 4">
+            <a:extLst>
+              <a:ext uri="{FF2B5EF4-FFF2-40B4-BE49-F238E27FC236}">
+                <a16:creationId xmlns:a16="http://schemas.microsoft.com/office/drawing/2014/main" id="{4F9348AA-9546-4A2C-458A-3C5E0E7A8F87}"/>
+              </a:ext>
+            </a:extLst>
+          </p:cNvPr>
+          <p:cNvSpPr/>
+          <p:nvPr/>
+        </p:nvSpPr>
+        <p:spPr>
+          <a:xfrm rot="13500000">
+            <a:off x="11340286" y="125999"/>
+            <a:ext cx="180000" cy="180000"/>
+          </a:xfrm>
+          <a:prstGeom prst="corner">
+            <a:avLst/>
+          </a:prstGeom>
+          <a:solidFill>
+            <a:schemeClr val="bg1"/>
+          </a:solidFill>
+          <a:ln>
+            <a:noFill/>
+          </a:ln>
+        </p:spPr>
+        <p:style>
+          <a:lnRef idx="2">
+            <a:schemeClr val="accent1">
+              <a:shade val="15000"/>
+            </a:schemeClr>
+          </a:lnRef>
+          <a:fillRef idx="1">
+            <a:schemeClr val="accent1"/>
+          </a:fillRef>
+          <a:effectRef idx="0">
+            <a:schemeClr val="accent1"/>
+          </a:effectRef>
+          <a:fontRef idx="minor">
+            <a:schemeClr val="lt1"/>
+          </a:fontRef>
+        </p:style>
+        <p:txBody>
+          <a:bodyPr rtlCol="0" anchor="ctr"/>
+          <a:lstStyle/>
+          <a:p>
+            <a:pPr algn="ctr"/>
+            <a:endParaRPr lang="ko-KR" altLang="en-US" dirty="0"/>
+          </a:p>
+        </p:txBody>
+      </p:sp>
+      <p:sp>
+        <p:nvSpPr>
+          <p:cNvPr id="6" name="L 도형 5">
+            <a:extLst>
+              <a:ext uri="{FF2B5EF4-FFF2-40B4-BE49-F238E27FC236}">
+                <a16:creationId xmlns:a16="http://schemas.microsoft.com/office/drawing/2014/main" id="{CD0274B5-2FBB-CCC2-3FDF-6B688797683C}"/>
+              </a:ext>
+            </a:extLst>
+          </p:cNvPr>
+          <p:cNvSpPr/>
+          <p:nvPr/>
+        </p:nvSpPr>
+        <p:spPr>
+          <a:xfrm rot="13500000">
+            <a:off x="11595610" y="123995"/>
+            <a:ext cx="180000" cy="180000"/>
+          </a:xfrm>
+          <a:prstGeom prst="corner">
+            <a:avLst/>
+          </a:prstGeom>
+          <a:solidFill>
+            <a:schemeClr val="bg1"/>
+          </a:solidFill>
+          <a:ln>
+            <a:noFill/>
+          </a:ln>
+        </p:spPr>
+        <p:style>
+          <a:lnRef idx="2">
+            <a:schemeClr val="accent1">
+              <a:shade val="15000"/>
+            </a:schemeClr>
+          </a:lnRef>
+          <a:fillRef idx="1">
+            <a:schemeClr val="accent1"/>
+          </a:fillRef>
+          <a:effectRef idx="0">
+            <a:schemeClr val="accent1"/>
+          </a:effectRef>
+          <a:fontRef idx="minor">
+            <a:schemeClr val="lt1"/>
+          </a:fontRef>
+        </p:style>
+        <p:txBody>
+          <a:bodyPr rtlCol="0" anchor="ctr"/>
+          <a:lstStyle/>
+          <a:p>
+            <a:pPr algn="ctr"/>
+            <a:endParaRPr lang="ko-KR" altLang="en-US" dirty="0"/>
+          </a:p>
+        </p:txBody>
+      </p:sp>
+      <p:sp>
+        <p:nvSpPr>
+          <p:cNvPr id="7" name="L 도형 6">
+            <a:extLst>
+              <a:ext uri="{FF2B5EF4-FFF2-40B4-BE49-F238E27FC236}">
+                <a16:creationId xmlns:a16="http://schemas.microsoft.com/office/drawing/2014/main" id="{F55AB5B5-649B-F4D3-54AC-E78424F260C5}"/>
+              </a:ext>
+            </a:extLst>
+          </p:cNvPr>
+          <p:cNvSpPr/>
+          <p:nvPr/>
+        </p:nvSpPr>
+        <p:spPr>
+          <a:xfrm rot="13500000">
+            <a:off x="11849405" y="126000"/>
+            <a:ext cx="180000" cy="180000"/>
+          </a:xfrm>
+          <a:prstGeom prst="corner">
+            <a:avLst/>
+          </a:prstGeom>
+          <a:solidFill>
+            <a:schemeClr val="bg1"/>
+          </a:solidFill>
+          <a:ln>
+            <a:noFill/>
+          </a:ln>
+        </p:spPr>
+        <p:style>
+          <a:lnRef idx="2">
+            <a:schemeClr val="accent1">
+              <a:shade val="15000"/>
+            </a:schemeClr>
+          </a:lnRef>
+          <a:fillRef idx="1">
+            <a:schemeClr val="accent1"/>
+          </a:fillRef>
+          <a:effectRef idx="0">
+            <a:schemeClr val="accent1"/>
+          </a:effectRef>
+          <a:fontRef idx="minor">
+            <a:schemeClr val="lt1"/>
+          </a:fontRef>
+        </p:style>
+        <p:txBody>
+          <a:bodyPr rtlCol="0" anchor="ctr"/>
+          <a:lstStyle/>
+          <a:p>
+            <a:pPr algn="ctr"/>
+            <a:endParaRPr lang="ko-KR" altLang="en-US" dirty="0"/>
+          </a:p>
+        </p:txBody>
+      </p:sp>
+      <p:sp>
+        <p:nvSpPr>
+          <p:cNvPr id="9" name="직사각형 8">
+            <a:extLst>
+              <a:ext uri="{FF2B5EF4-FFF2-40B4-BE49-F238E27FC236}">
+                <a16:creationId xmlns:a16="http://schemas.microsoft.com/office/drawing/2014/main" id="{3F27DF61-677C-F35A-C9F2-52DBB017AE96}"/>
+              </a:ext>
+            </a:extLst>
+          </p:cNvPr>
+          <p:cNvSpPr/>
+          <p:nvPr/>
+        </p:nvSpPr>
+        <p:spPr>
+          <a:xfrm>
+            <a:off x="-766" y="1059394"/>
+            <a:ext cx="2880000" cy="18000"/>
+          </a:xfrm>
+          <a:prstGeom prst="rect">
+            <a:avLst/>
+          </a:prstGeom>
+          <a:solidFill>
+            <a:schemeClr val="bg2"/>
+          </a:solidFill>
+          <a:ln>
+            <a:noFill/>
+          </a:ln>
+        </p:spPr>
+        <p:style>
+          <a:lnRef idx="2">
+            <a:schemeClr val="accent1">
+              <a:shade val="15000"/>
+            </a:schemeClr>
+          </a:lnRef>
+          <a:fillRef idx="1">
+            <a:schemeClr val="accent1"/>
+          </a:fillRef>
+          <a:effectRef idx="0">
+            <a:schemeClr val="accent1"/>
+          </a:effectRef>
+          <a:fontRef idx="minor">
+            <a:schemeClr val="lt1"/>
+          </a:fontRef>
+        </p:style>
+        <p:txBody>
+          <a:bodyPr rtlCol="0" anchor="ctr"/>
+          <a:lstStyle/>
+          <a:p>
+            <a:pPr algn="ctr"/>
+            <a:endParaRPr lang="ko-KR" altLang="en-US"/>
+          </a:p>
+        </p:txBody>
+      </p:sp>
+      <p:sp>
+        <p:nvSpPr>
+          <p:cNvPr id="10" name="직사각형 9">
+            <a:extLst>
+              <a:ext uri="{FF2B5EF4-FFF2-40B4-BE49-F238E27FC236}">
+                <a16:creationId xmlns:a16="http://schemas.microsoft.com/office/drawing/2014/main" id="{BB74B0A1-2171-CBBC-C714-22F54AD41B9A}"/>
+              </a:ext>
+            </a:extLst>
+          </p:cNvPr>
+          <p:cNvSpPr/>
+          <p:nvPr/>
+        </p:nvSpPr>
+        <p:spPr>
+          <a:xfrm>
+            <a:off x="2771234" y="1068394"/>
+            <a:ext cx="108000" cy="108000"/>
+          </a:xfrm>
+          <a:prstGeom prst="rect">
+            <a:avLst/>
+          </a:prstGeom>
+          <a:solidFill>
+            <a:schemeClr val="bg2"/>
+          </a:solidFill>
+          <a:ln>
+            <a:noFill/>
+          </a:ln>
+        </p:spPr>
+        <p:style>
+          <a:lnRef idx="2">
+            <a:schemeClr val="accent1">
+              <a:shade val="15000"/>
+            </a:schemeClr>
+          </a:lnRef>
+          <a:fillRef idx="1">
+            <a:schemeClr val="accent1"/>
+          </a:fillRef>
+          <a:effectRef idx="0">
+            <a:schemeClr val="accent1"/>
+          </a:effectRef>
+          <a:fontRef idx="minor">
+            <a:schemeClr val="lt1"/>
+          </a:fontRef>
+        </p:style>
+        <p:txBody>
+          <a:bodyPr rtlCol="0" anchor="ctr"/>
+          <a:lstStyle/>
+          <a:p>
+            <a:pPr algn="ctr"/>
+            <a:endParaRPr lang="ko-KR" altLang="en-US" dirty="0"/>
+          </a:p>
+        </p:txBody>
+      </p:sp>
+      <p:sp>
+        <p:nvSpPr>
+          <p:cNvPr id="11" name="제목 1">
+            <a:extLst>
+              <a:ext uri="{FF2B5EF4-FFF2-40B4-BE49-F238E27FC236}">
+                <a16:creationId xmlns:a16="http://schemas.microsoft.com/office/drawing/2014/main" id="{67BCF6BD-0DE3-693F-558E-46D224F3BF53}"/>
+              </a:ext>
+            </a:extLst>
+          </p:cNvPr>
+          <p:cNvSpPr txBox="1">
+            <a:spLocks/>
+          </p:cNvSpPr>
+          <p:nvPr/>
+        </p:nvSpPr>
+        <p:spPr>
+          <a:xfrm>
+            <a:off x="-63341" y="341275"/>
+            <a:ext cx="5101624" cy="1289849"/>
+          </a:xfrm>
+          <a:prstGeom prst="rect">
+            <a:avLst/>
+          </a:prstGeom>
+        </p:spPr>
+        <p:txBody>
+          <a:bodyPr/>
+          <a:lstStyle>
+            <a:lvl1pPr algn="l" defTabSz="914400" rtl="0" eaLnBrk="1" latinLnBrk="1" hangingPunct="1">
+              <a:lnSpc>
+                <a:spcPct val="90000"/>
+              </a:lnSpc>
+              <a:spcBef>
+                <a:spcPct val="0"/>
+              </a:spcBef>
+              <a:buNone/>
+              <a:defRPr sz="4400" kern="1200">
+                <a:solidFill>
+                  <a:schemeClr val="tx1"/>
+                </a:solidFill>
+                <a:latin typeface="+mj-lt"/>
+                <a:ea typeface="+mj-ea"/>
+                <a:cs typeface="+mj-cs"/>
+              </a:defRPr>
+            </a:lvl1pPr>
+          </a:lstStyle>
+          <a:p>
+            <a:r>
+              <a:rPr lang="ko-KR" altLang="en-US" b="1" dirty="0">
+                <a:latin typeface="Noto Sans KR" panose="020B0200000000000000" pitchFamily="50" charset="-127"/>
+                <a:ea typeface="Noto Sans KR" panose="020B0200000000000000" pitchFamily="50" charset="-127"/>
+              </a:rPr>
+              <a:t>   </a:t>
+            </a:r>
+            <a:r>
+              <a:rPr lang="ko-KR" altLang="en-US" sz="3600" b="1" dirty="0">
+                <a:latin typeface="Noto Sans KR Black" panose="020B0200000000000000" pitchFamily="50" charset="-127"/>
+                <a:ea typeface="Noto Sans KR Black" panose="020B0200000000000000" pitchFamily="50" charset="-127"/>
+              </a:rPr>
+              <a:t>화면설계서</a:t>
+            </a:r>
+            <a:endParaRPr lang="ko-KR" altLang="en-US" sz="3600" dirty="0">
+              <a:latin typeface="Noto Sans KR Black" panose="020B0200000000000000" pitchFamily="50" charset="-127"/>
+              <a:ea typeface="Noto Sans KR Black" panose="020B0200000000000000" pitchFamily="50" charset="-127"/>
+            </a:endParaRPr>
+          </a:p>
+        </p:txBody>
+      </p:sp>
+    </p:spTree>
+    <p:extLst>
+      <p:ext uri="{BB962C8B-B14F-4D97-AF65-F5344CB8AC3E}">
+        <p14:creationId xmlns:p14="http://schemas.microsoft.com/office/powerpoint/2010/main" val="2590342442"/>
+      </p:ext>
+    </p:extLst>
+  </p:cSld>
+  <p:clrMapOvr>
+    <a:masterClrMapping/>
+  </p:clrMapOvr>
+</p:sld>
+</file>
+
 <file path=ppt/slides/slide2.xml><?xml version="1.0" encoding="utf-8"?>
 <p:sld xmlns:a="http://schemas.openxmlformats.org/drawingml/2006/main" xmlns:r="http://schemas.openxmlformats.org/officeDocument/2006/relationships" xmlns:p="http://schemas.openxmlformats.org/presentationml/2006/main">
   <p:cSld>
@@ -9673,6 +12161,42 @@
           <a:chExt cx="0" cy="0"/>
         </a:xfrm>
       </p:grpSpPr>
+      <p:pic>
+        <p:nvPicPr>
+          <p:cNvPr id="8" name="그림 7" descr="텍스트, 스크린샷이(가) 표시된 사진&#10;&#10;AI가 생성한 콘텐츠는 부정확할 수 있습니다.">
+            <a:extLst>
+              <a:ext uri="{FF2B5EF4-FFF2-40B4-BE49-F238E27FC236}">
+                <a16:creationId xmlns:a16="http://schemas.microsoft.com/office/drawing/2014/main" id="{5E2A7C5A-3C54-55C4-8F5A-F7CA712AFDC0}"/>
+              </a:ext>
+            </a:extLst>
+          </p:cNvPr>
+          <p:cNvPicPr>
+            <a:picLocks noChangeAspect="1"/>
+          </p:cNvPicPr>
+          <p:nvPr/>
+        </p:nvPicPr>
+        <p:blipFill>
+          <a:blip r:embed="rId2">
+            <a:extLst>
+              <a:ext uri="{28A0092B-C50C-407E-A947-70E740481C1C}">
+                <a14:useLocalDpi xmlns:a14="http://schemas.microsoft.com/office/drawing/2010/main" val="0"/>
+              </a:ext>
+            </a:extLst>
+          </a:blip>
+          <a:stretch>
+            <a:fillRect/>
+          </a:stretch>
+        </p:blipFill>
+        <p:spPr>
+          <a:xfrm>
+            <a:off x="984000" y="1017000"/>
+            <a:ext cx="10364647" cy="5830113"/>
+          </a:xfrm>
+          <a:prstGeom prst="rect">
+            <a:avLst/>
+          </a:prstGeom>
+        </p:spPr>
+      </p:pic>
       <p:sp>
         <p:nvSpPr>
           <p:cNvPr id="3" name="직사각형 2">
@@ -10107,6 +12631,1494 @@
     <p:extLst>
       <p:ext uri="{BB962C8B-B14F-4D97-AF65-F5344CB8AC3E}">
         <p14:creationId xmlns:p14="http://schemas.microsoft.com/office/powerpoint/2010/main" val="3668374664"/>
+      </p:ext>
+    </p:extLst>
+  </p:cSld>
+  <p:clrMapOvr>
+    <a:masterClrMapping/>
+  </p:clrMapOvr>
+</p:sld>
+</file>
+
+<file path=ppt/slides/slide7.xml><?xml version="1.0" encoding="utf-8"?>
+<p:sld xmlns:a="http://schemas.openxmlformats.org/drawingml/2006/main" xmlns:r="http://schemas.openxmlformats.org/officeDocument/2006/relationships" xmlns:p="http://schemas.openxmlformats.org/presentationml/2006/main">
+  <p:cSld>
+    <p:spTree>
+      <p:nvGrpSpPr>
+        <p:cNvPr id="1" name=""/>
+        <p:cNvGrpSpPr/>
+        <p:nvPr/>
+      </p:nvGrpSpPr>
+      <p:grpSpPr>
+        <a:xfrm>
+          <a:off x="0" y="0"/>
+          <a:ext cx="0" cy="0"/>
+          <a:chOff x="0" y="0"/>
+          <a:chExt cx="0" cy="0"/>
+        </a:xfrm>
+      </p:grpSpPr>
+      <p:pic>
+        <p:nvPicPr>
+          <p:cNvPr id="8" name="그림 7" descr="텍스트, 스크린샷, 폰트, 도표이(가) 표시된 사진&#10;&#10;AI가 생성한 콘텐츠는 부정확할 수 있습니다.">
+            <a:extLst>
+              <a:ext uri="{FF2B5EF4-FFF2-40B4-BE49-F238E27FC236}">
+                <a16:creationId xmlns:a16="http://schemas.microsoft.com/office/drawing/2014/main" id="{45FD3967-159E-BED7-0E32-968710A6008C}"/>
+              </a:ext>
+            </a:extLst>
+          </p:cNvPr>
+          <p:cNvPicPr>
+            <a:picLocks noChangeAspect="1"/>
+          </p:cNvPicPr>
+          <p:nvPr/>
+        </p:nvPicPr>
+        <p:blipFill>
+          <a:blip r:embed="rId2">
+            <a:extLst>
+              <a:ext uri="{28A0092B-C50C-407E-A947-70E740481C1C}">
+                <a14:useLocalDpi xmlns:a14="http://schemas.microsoft.com/office/drawing/2010/main" val="0"/>
+              </a:ext>
+            </a:extLst>
+          </a:blip>
+          <a:stretch>
+            <a:fillRect/>
+          </a:stretch>
+        </p:blipFill>
+        <p:spPr>
+          <a:xfrm>
+            <a:off x="984000" y="1017000"/>
+            <a:ext cx="10364647" cy="5830113"/>
+          </a:xfrm>
+          <a:prstGeom prst="rect">
+            <a:avLst/>
+          </a:prstGeom>
+        </p:spPr>
+      </p:pic>
+      <p:sp>
+        <p:nvSpPr>
+          <p:cNvPr id="3" name="직사각형 2">
+            <a:extLst>
+              <a:ext uri="{FF2B5EF4-FFF2-40B4-BE49-F238E27FC236}">
+                <a16:creationId xmlns:a16="http://schemas.microsoft.com/office/drawing/2014/main" id="{A1BC658B-3A71-2467-CB33-03A51800EBDC}"/>
+              </a:ext>
+            </a:extLst>
+          </p:cNvPr>
+          <p:cNvSpPr/>
+          <p:nvPr/>
+        </p:nvSpPr>
+        <p:spPr>
+          <a:xfrm>
+            <a:off x="-1" y="0"/>
+            <a:ext cx="12193200" cy="432000"/>
+          </a:xfrm>
+          <a:prstGeom prst="rect">
+            <a:avLst/>
+          </a:prstGeom>
+          <a:solidFill>
+            <a:srgbClr val="FFC000"/>
+          </a:solidFill>
+          <a:ln>
+            <a:noFill/>
+          </a:ln>
+        </p:spPr>
+        <p:style>
+          <a:lnRef idx="2">
+            <a:schemeClr val="accent1">
+              <a:shade val="15000"/>
+            </a:schemeClr>
+          </a:lnRef>
+          <a:fillRef idx="1">
+            <a:schemeClr val="accent1"/>
+          </a:fillRef>
+          <a:effectRef idx="0">
+            <a:schemeClr val="accent1"/>
+          </a:effectRef>
+          <a:fontRef idx="minor">
+            <a:schemeClr val="lt1"/>
+          </a:fontRef>
+        </p:style>
+        <p:txBody>
+          <a:bodyPr rtlCol="0" anchor="ctr"/>
+          <a:lstStyle/>
+          <a:p>
+            <a:pPr algn="ctr"/>
+            <a:endParaRPr lang="ko-KR" altLang="en-US"/>
+          </a:p>
+        </p:txBody>
+      </p:sp>
+      <p:sp>
+        <p:nvSpPr>
+          <p:cNvPr id="4" name="사각형: 잘린 한쪽 모서리 3">
+            <a:extLst>
+              <a:ext uri="{FF2B5EF4-FFF2-40B4-BE49-F238E27FC236}">
+                <a16:creationId xmlns:a16="http://schemas.microsoft.com/office/drawing/2014/main" id="{6C29B8CC-D569-0884-2DE9-9DFCA7850BB2}"/>
+              </a:ext>
+            </a:extLst>
+          </p:cNvPr>
+          <p:cNvSpPr/>
+          <p:nvPr/>
+        </p:nvSpPr>
+        <p:spPr>
+          <a:xfrm>
+            <a:off x="-766" y="317921"/>
+            <a:ext cx="2880000" cy="775120"/>
+          </a:xfrm>
+          <a:prstGeom prst="snip1Rect">
+            <a:avLst/>
+          </a:prstGeom>
+          <a:solidFill>
+            <a:schemeClr val="bg1"/>
+          </a:solidFill>
+          <a:ln>
+            <a:noFill/>
+          </a:ln>
+        </p:spPr>
+        <p:style>
+          <a:lnRef idx="2">
+            <a:schemeClr val="accent1">
+              <a:shade val="15000"/>
+            </a:schemeClr>
+          </a:lnRef>
+          <a:fillRef idx="1">
+            <a:schemeClr val="accent1"/>
+          </a:fillRef>
+          <a:effectRef idx="0">
+            <a:schemeClr val="accent1"/>
+          </a:effectRef>
+          <a:fontRef idx="minor">
+            <a:schemeClr val="lt1"/>
+          </a:fontRef>
+        </p:style>
+        <p:txBody>
+          <a:bodyPr rtlCol="0" anchor="ctr"/>
+          <a:lstStyle/>
+          <a:p>
+            <a:pPr algn="ctr"/>
+            <a:endParaRPr lang="ko-KR" altLang="en-US" dirty="0"/>
+          </a:p>
+        </p:txBody>
+      </p:sp>
+      <p:sp>
+        <p:nvSpPr>
+          <p:cNvPr id="5" name="L 도형 4">
+            <a:extLst>
+              <a:ext uri="{FF2B5EF4-FFF2-40B4-BE49-F238E27FC236}">
+                <a16:creationId xmlns:a16="http://schemas.microsoft.com/office/drawing/2014/main" id="{4F9348AA-9546-4A2C-458A-3C5E0E7A8F87}"/>
+              </a:ext>
+            </a:extLst>
+          </p:cNvPr>
+          <p:cNvSpPr/>
+          <p:nvPr/>
+        </p:nvSpPr>
+        <p:spPr>
+          <a:xfrm rot="13500000">
+            <a:off x="11340286" y="125999"/>
+            <a:ext cx="180000" cy="180000"/>
+          </a:xfrm>
+          <a:prstGeom prst="corner">
+            <a:avLst/>
+          </a:prstGeom>
+          <a:solidFill>
+            <a:schemeClr val="bg1"/>
+          </a:solidFill>
+          <a:ln>
+            <a:noFill/>
+          </a:ln>
+        </p:spPr>
+        <p:style>
+          <a:lnRef idx="2">
+            <a:schemeClr val="accent1">
+              <a:shade val="15000"/>
+            </a:schemeClr>
+          </a:lnRef>
+          <a:fillRef idx="1">
+            <a:schemeClr val="accent1"/>
+          </a:fillRef>
+          <a:effectRef idx="0">
+            <a:schemeClr val="accent1"/>
+          </a:effectRef>
+          <a:fontRef idx="minor">
+            <a:schemeClr val="lt1"/>
+          </a:fontRef>
+        </p:style>
+        <p:txBody>
+          <a:bodyPr rtlCol="0" anchor="ctr"/>
+          <a:lstStyle/>
+          <a:p>
+            <a:pPr algn="ctr"/>
+            <a:endParaRPr lang="ko-KR" altLang="en-US" dirty="0"/>
+          </a:p>
+        </p:txBody>
+      </p:sp>
+      <p:sp>
+        <p:nvSpPr>
+          <p:cNvPr id="6" name="L 도형 5">
+            <a:extLst>
+              <a:ext uri="{FF2B5EF4-FFF2-40B4-BE49-F238E27FC236}">
+                <a16:creationId xmlns:a16="http://schemas.microsoft.com/office/drawing/2014/main" id="{CD0274B5-2FBB-CCC2-3FDF-6B688797683C}"/>
+              </a:ext>
+            </a:extLst>
+          </p:cNvPr>
+          <p:cNvSpPr/>
+          <p:nvPr/>
+        </p:nvSpPr>
+        <p:spPr>
+          <a:xfrm rot="13500000">
+            <a:off x="11595610" y="123995"/>
+            <a:ext cx="180000" cy="180000"/>
+          </a:xfrm>
+          <a:prstGeom prst="corner">
+            <a:avLst/>
+          </a:prstGeom>
+          <a:solidFill>
+            <a:schemeClr val="bg1"/>
+          </a:solidFill>
+          <a:ln>
+            <a:noFill/>
+          </a:ln>
+        </p:spPr>
+        <p:style>
+          <a:lnRef idx="2">
+            <a:schemeClr val="accent1">
+              <a:shade val="15000"/>
+            </a:schemeClr>
+          </a:lnRef>
+          <a:fillRef idx="1">
+            <a:schemeClr val="accent1"/>
+          </a:fillRef>
+          <a:effectRef idx="0">
+            <a:schemeClr val="accent1"/>
+          </a:effectRef>
+          <a:fontRef idx="minor">
+            <a:schemeClr val="lt1"/>
+          </a:fontRef>
+        </p:style>
+        <p:txBody>
+          <a:bodyPr rtlCol="0" anchor="ctr"/>
+          <a:lstStyle/>
+          <a:p>
+            <a:pPr algn="ctr"/>
+            <a:endParaRPr lang="ko-KR" altLang="en-US" dirty="0"/>
+          </a:p>
+        </p:txBody>
+      </p:sp>
+      <p:sp>
+        <p:nvSpPr>
+          <p:cNvPr id="7" name="L 도형 6">
+            <a:extLst>
+              <a:ext uri="{FF2B5EF4-FFF2-40B4-BE49-F238E27FC236}">
+                <a16:creationId xmlns:a16="http://schemas.microsoft.com/office/drawing/2014/main" id="{F55AB5B5-649B-F4D3-54AC-E78424F260C5}"/>
+              </a:ext>
+            </a:extLst>
+          </p:cNvPr>
+          <p:cNvSpPr/>
+          <p:nvPr/>
+        </p:nvSpPr>
+        <p:spPr>
+          <a:xfrm rot="13500000">
+            <a:off x="11849405" y="126000"/>
+            <a:ext cx="180000" cy="180000"/>
+          </a:xfrm>
+          <a:prstGeom prst="corner">
+            <a:avLst/>
+          </a:prstGeom>
+          <a:solidFill>
+            <a:schemeClr val="bg1"/>
+          </a:solidFill>
+          <a:ln>
+            <a:noFill/>
+          </a:ln>
+        </p:spPr>
+        <p:style>
+          <a:lnRef idx="2">
+            <a:schemeClr val="accent1">
+              <a:shade val="15000"/>
+            </a:schemeClr>
+          </a:lnRef>
+          <a:fillRef idx="1">
+            <a:schemeClr val="accent1"/>
+          </a:fillRef>
+          <a:effectRef idx="0">
+            <a:schemeClr val="accent1"/>
+          </a:effectRef>
+          <a:fontRef idx="minor">
+            <a:schemeClr val="lt1"/>
+          </a:fontRef>
+        </p:style>
+        <p:txBody>
+          <a:bodyPr rtlCol="0" anchor="ctr"/>
+          <a:lstStyle/>
+          <a:p>
+            <a:pPr algn="ctr"/>
+            <a:endParaRPr lang="ko-KR" altLang="en-US" dirty="0"/>
+          </a:p>
+        </p:txBody>
+      </p:sp>
+      <p:sp>
+        <p:nvSpPr>
+          <p:cNvPr id="9" name="직사각형 8">
+            <a:extLst>
+              <a:ext uri="{FF2B5EF4-FFF2-40B4-BE49-F238E27FC236}">
+                <a16:creationId xmlns:a16="http://schemas.microsoft.com/office/drawing/2014/main" id="{3F27DF61-677C-F35A-C9F2-52DBB017AE96}"/>
+              </a:ext>
+            </a:extLst>
+          </p:cNvPr>
+          <p:cNvSpPr/>
+          <p:nvPr/>
+        </p:nvSpPr>
+        <p:spPr>
+          <a:xfrm>
+            <a:off x="-766" y="1059394"/>
+            <a:ext cx="2880000" cy="18000"/>
+          </a:xfrm>
+          <a:prstGeom prst="rect">
+            <a:avLst/>
+          </a:prstGeom>
+          <a:solidFill>
+            <a:schemeClr val="bg2"/>
+          </a:solidFill>
+          <a:ln>
+            <a:noFill/>
+          </a:ln>
+        </p:spPr>
+        <p:style>
+          <a:lnRef idx="2">
+            <a:schemeClr val="accent1">
+              <a:shade val="15000"/>
+            </a:schemeClr>
+          </a:lnRef>
+          <a:fillRef idx="1">
+            <a:schemeClr val="accent1"/>
+          </a:fillRef>
+          <a:effectRef idx="0">
+            <a:schemeClr val="accent1"/>
+          </a:effectRef>
+          <a:fontRef idx="minor">
+            <a:schemeClr val="lt1"/>
+          </a:fontRef>
+        </p:style>
+        <p:txBody>
+          <a:bodyPr rtlCol="0" anchor="ctr"/>
+          <a:lstStyle/>
+          <a:p>
+            <a:pPr algn="ctr"/>
+            <a:endParaRPr lang="ko-KR" altLang="en-US"/>
+          </a:p>
+        </p:txBody>
+      </p:sp>
+      <p:sp>
+        <p:nvSpPr>
+          <p:cNvPr id="10" name="직사각형 9">
+            <a:extLst>
+              <a:ext uri="{FF2B5EF4-FFF2-40B4-BE49-F238E27FC236}">
+                <a16:creationId xmlns:a16="http://schemas.microsoft.com/office/drawing/2014/main" id="{BB74B0A1-2171-CBBC-C714-22F54AD41B9A}"/>
+              </a:ext>
+            </a:extLst>
+          </p:cNvPr>
+          <p:cNvSpPr/>
+          <p:nvPr/>
+        </p:nvSpPr>
+        <p:spPr>
+          <a:xfrm>
+            <a:off x="2771234" y="1068394"/>
+            <a:ext cx="108000" cy="108000"/>
+          </a:xfrm>
+          <a:prstGeom prst="rect">
+            <a:avLst/>
+          </a:prstGeom>
+          <a:solidFill>
+            <a:schemeClr val="bg2"/>
+          </a:solidFill>
+          <a:ln>
+            <a:noFill/>
+          </a:ln>
+        </p:spPr>
+        <p:style>
+          <a:lnRef idx="2">
+            <a:schemeClr val="accent1">
+              <a:shade val="15000"/>
+            </a:schemeClr>
+          </a:lnRef>
+          <a:fillRef idx="1">
+            <a:schemeClr val="accent1"/>
+          </a:fillRef>
+          <a:effectRef idx="0">
+            <a:schemeClr val="accent1"/>
+          </a:effectRef>
+          <a:fontRef idx="minor">
+            <a:schemeClr val="lt1"/>
+          </a:fontRef>
+        </p:style>
+        <p:txBody>
+          <a:bodyPr rtlCol="0" anchor="ctr"/>
+          <a:lstStyle/>
+          <a:p>
+            <a:pPr algn="ctr"/>
+            <a:endParaRPr lang="ko-KR" altLang="en-US" dirty="0"/>
+          </a:p>
+        </p:txBody>
+      </p:sp>
+      <p:sp>
+        <p:nvSpPr>
+          <p:cNvPr id="11" name="제목 1">
+            <a:extLst>
+              <a:ext uri="{FF2B5EF4-FFF2-40B4-BE49-F238E27FC236}">
+                <a16:creationId xmlns:a16="http://schemas.microsoft.com/office/drawing/2014/main" id="{67BCF6BD-0DE3-693F-558E-46D224F3BF53}"/>
+              </a:ext>
+            </a:extLst>
+          </p:cNvPr>
+          <p:cNvSpPr txBox="1">
+            <a:spLocks/>
+          </p:cNvSpPr>
+          <p:nvPr/>
+        </p:nvSpPr>
+        <p:spPr>
+          <a:xfrm>
+            <a:off x="-63341" y="341275"/>
+            <a:ext cx="5101624" cy="1289849"/>
+          </a:xfrm>
+          <a:prstGeom prst="rect">
+            <a:avLst/>
+          </a:prstGeom>
+        </p:spPr>
+        <p:txBody>
+          <a:bodyPr/>
+          <a:lstStyle>
+            <a:lvl1pPr algn="l" defTabSz="914400" rtl="0" eaLnBrk="1" latinLnBrk="1" hangingPunct="1">
+              <a:lnSpc>
+                <a:spcPct val="90000"/>
+              </a:lnSpc>
+              <a:spcBef>
+                <a:spcPct val="0"/>
+              </a:spcBef>
+              <a:buNone/>
+              <a:defRPr sz="4400" kern="1200">
+                <a:solidFill>
+                  <a:schemeClr val="tx1"/>
+                </a:solidFill>
+                <a:latin typeface="+mj-lt"/>
+                <a:ea typeface="+mj-ea"/>
+                <a:cs typeface="+mj-cs"/>
+              </a:defRPr>
+            </a:lvl1pPr>
+          </a:lstStyle>
+          <a:p>
+            <a:r>
+              <a:rPr lang="ko-KR" altLang="en-US" b="1" dirty="0">
+                <a:latin typeface="Noto Sans KR" panose="020B0200000000000000" pitchFamily="50" charset="-127"/>
+                <a:ea typeface="Noto Sans KR" panose="020B0200000000000000" pitchFamily="50" charset="-127"/>
+              </a:rPr>
+              <a:t>   </a:t>
+            </a:r>
+            <a:r>
+              <a:rPr lang="ko-KR" altLang="en-US" sz="3600" b="1" dirty="0">
+                <a:latin typeface="Noto Sans KR Black" panose="020B0200000000000000" pitchFamily="50" charset="-127"/>
+                <a:ea typeface="Noto Sans KR Black" panose="020B0200000000000000" pitchFamily="50" charset="-127"/>
+              </a:rPr>
+              <a:t>화면설계서</a:t>
+            </a:r>
+            <a:endParaRPr lang="ko-KR" altLang="en-US" sz="3600" dirty="0">
+              <a:latin typeface="Noto Sans KR Black" panose="020B0200000000000000" pitchFamily="50" charset="-127"/>
+              <a:ea typeface="Noto Sans KR Black" panose="020B0200000000000000" pitchFamily="50" charset="-127"/>
+            </a:endParaRPr>
+          </a:p>
+        </p:txBody>
+      </p:sp>
+    </p:spTree>
+    <p:extLst>
+      <p:ext uri="{BB962C8B-B14F-4D97-AF65-F5344CB8AC3E}">
+        <p14:creationId xmlns:p14="http://schemas.microsoft.com/office/powerpoint/2010/main" val="1308089657"/>
+      </p:ext>
+    </p:extLst>
+  </p:cSld>
+  <p:clrMapOvr>
+    <a:masterClrMapping/>
+  </p:clrMapOvr>
+</p:sld>
+</file>
+
+<file path=ppt/slides/slide8.xml><?xml version="1.0" encoding="utf-8"?>
+<p:sld xmlns:a="http://schemas.openxmlformats.org/drawingml/2006/main" xmlns:r="http://schemas.openxmlformats.org/officeDocument/2006/relationships" xmlns:p="http://schemas.openxmlformats.org/presentationml/2006/main">
+  <p:cSld>
+    <p:spTree>
+      <p:nvGrpSpPr>
+        <p:cNvPr id="1" name=""/>
+        <p:cNvGrpSpPr/>
+        <p:nvPr/>
+      </p:nvGrpSpPr>
+      <p:grpSpPr>
+        <a:xfrm>
+          <a:off x="0" y="0"/>
+          <a:ext cx="0" cy="0"/>
+          <a:chOff x="0" y="0"/>
+          <a:chExt cx="0" cy="0"/>
+        </a:xfrm>
+      </p:grpSpPr>
+      <p:pic>
+        <p:nvPicPr>
+          <p:cNvPr id="8" name="그림 7" descr="텍스트, 스크린샷, 폰트, 도표이(가) 표시된 사진&#10;&#10;AI가 생성한 콘텐츠는 부정확할 수 있습니다.">
+            <a:extLst>
+              <a:ext uri="{FF2B5EF4-FFF2-40B4-BE49-F238E27FC236}">
+                <a16:creationId xmlns:a16="http://schemas.microsoft.com/office/drawing/2014/main" id="{0B1E3B81-A44D-1129-BCCF-80B5D17E4308}"/>
+              </a:ext>
+            </a:extLst>
+          </p:cNvPr>
+          <p:cNvPicPr>
+            <a:picLocks noChangeAspect="1"/>
+          </p:cNvPicPr>
+          <p:nvPr/>
+        </p:nvPicPr>
+        <p:blipFill>
+          <a:blip r:embed="rId2">
+            <a:extLst>
+              <a:ext uri="{28A0092B-C50C-407E-A947-70E740481C1C}">
+                <a14:useLocalDpi xmlns:a14="http://schemas.microsoft.com/office/drawing/2010/main" val="0"/>
+              </a:ext>
+            </a:extLst>
+          </a:blip>
+          <a:stretch>
+            <a:fillRect/>
+          </a:stretch>
+        </p:blipFill>
+        <p:spPr>
+          <a:xfrm>
+            <a:off x="972000" y="1008000"/>
+            <a:ext cx="10364647" cy="5830113"/>
+          </a:xfrm>
+          <a:prstGeom prst="rect">
+            <a:avLst/>
+          </a:prstGeom>
+        </p:spPr>
+      </p:pic>
+      <p:sp>
+        <p:nvSpPr>
+          <p:cNvPr id="3" name="직사각형 2">
+            <a:extLst>
+              <a:ext uri="{FF2B5EF4-FFF2-40B4-BE49-F238E27FC236}">
+                <a16:creationId xmlns:a16="http://schemas.microsoft.com/office/drawing/2014/main" id="{A1BC658B-3A71-2467-CB33-03A51800EBDC}"/>
+              </a:ext>
+            </a:extLst>
+          </p:cNvPr>
+          <p:cNvSpPr/>
+          <p:nvPr/>
+        </p:nvSpPr>
+        <p:spPr>
+          <a:xfrm>
+            <a:off x="-1" y="0"/>
+            <a:ext cx="12193200" cy="432000"/>
+          </a:xfrm>
+          <a:prstGeom prst="rect">
+            <a:avLst/>
+          </a:prstGeom>
+          <a:solidFill>
+            <a:srgbClr val="FFC000"/>
+          </a:solidFill>
+          <a:ln>
+            <a:noFill/>
+          </a:ln>
+        </p:spPr>
+        <p:style>
+          <a:lnRef idx="2">
+            <a:schemeClr val="accent1">
+              <a:shade val="15000"/>
+            </a:schemeClr>
+          </a:lnRef>
+          <a:fillRef idx="1">
+            <a:schemeClr val="accent1"/>
+          </a:fillRef>
+          <a:effectRef idx="0">
+            <a:schemeClr val="accent1"/>
+          </a:effectRef>
+          <a:fontRef idx="minor">
+            <a:schemeClr val="lt1"/>
+          </a:fontRef>
+        </p:style>
+        <p:txBody>
+          <a:bodyPr rtlCol="0" anchor="ctr"/>
+          <a:lstStyle/>
+          <a:p>
+            <a:pPr algn="ctr"/>
+            <a:endParaRPr lang="ko-KR" altLang="en-US"/>
+          </a:p>
+        </p:txBody>
+      </p:sp>
+      <p:sp>
+        <p:nvSpPr>
+          <p:cNvPr id="4" name="사각형: 잘린 한쪽 모서리 3">
+            <a:extLst>
+              <a:ext uri="{FF2B5EF4-FFF2-40B4-BE49-F238E27FC236}">
+                <a16:creationId xmlns:a16="http://schemas.microsoft.com/office/drawing/2014/main" id="{6C29B8CC-D569-0884-2DE9-9DFCA7850BB2}"/>
+              </a:ext>
+            </a:extLst>
+          </p:cNvPr>
+          <p:cNvSpPr/>
+          <p:nvPr/>
+        </p:nvSpPr>
+        <p:spPr>
+          <a:xfrm>
+            <a:off x="-766" y="317921"/>
+            <a:ext cx="2880000" cy="775120"/>
+          </a:xfrm>
+          <a:prstGeom prst="snip1Rect">
+            <a:avLst/>
+          </a:prstGeom>
+          <a:solidFill>
+            <a:schemeClr val="bg1"/>
+          </a:solidFill>
+          <a:ln>
+            <a:noFill/>
+          </a:ln>
+        </p:spPr>
+        <p:style>
+          <a:lnRef idx="2">
+            <a:schemeClr val="accent1">
+              <a:shade val="15000"/>
+            </a:schemeClr>
+          </a:lnRef>
+          <a:fillRef idx="1">
+            <a:schemeClr val="accent1"/>
+          </a:fillRef>
+          <a:effectRef idx="0">
+            <a:schemeClr val="accent1"/>
+          </a:effectRef>
+          <a:fontRef idx="minor">
+            <a:schemeClr val="lt1"/>
+          </a:fontRef>
+        </p:style>
+        <p:txBody>
+          <a:bodyPr rtlCol="0" anchor="ctr"/>
+          <a:lstStyle/>
+          <a:p>
+            <a:pPr algn="ctr"/>
+            <a:endParaRPr lang="ko-KR" altLang="en-US" dirty="0"/>
+          </a:p>
+        </p:txBody>
+      </p:sp>
+      <p:sp>
+        <p:nvSpPr>
+          <p:cNvPr id="5" name="L 도형 4">
+            <a:extLst>
+              <a:ext uri="{FF2B5EF4-FFF2-40B4-BE49-F238E27FC236}">
+                <a16:creationId xmlns:a16="http://schemas.microsoft.com/office/drawing/2014/main" id="{4F9348AA-9546-4A2C-458A-3C5E0E7A8F87}"/>
+              </a:ext>
+            </a:extLst>
+          </p:cNvPr>
+          <p:cNvSpPr/>
+          <p:nvPr/>
+        </p:nvSpPr>
+        <p:spPr>
+          <a:xfrm rot="13500000">
+            <a:off x="11340286" y="125999"/>
+            <a:ext cx="180000" cy="180000"/>
+          </a:xfrm>
+          <a:prstGeom prst="corner">
+            <a:avLst/>
+          </a:prstGeom>
+          <a:solidFill>
+            <a:schemeClr val="bg1"/>
+          </a:solidFill>
+          <a:ln>
+            <a:noFill/>
+          </a:ln>
+        </p:spPr>
+        <p:style>
+          <a:lnRef idx="2">
+            <a:schemeClr val="accent1">
+              <a:shade val="15000"/>
+            </a:schemeClr>
+          </a:lnRef>
+          <a:fillRef idx="1">
+            <a:schemeClr val="accent1"/>
+          </a:fillRef>
+          <a:effectRef idx="0">
+            <a:schemeClr val="accent1"/>
+          </a:effectRef>
+          <a:fontRef idx="minor">
+            <a:schemeClr val="lt1"/>
+          </a:fontRef>
+        </p:style>
+        <p:txBody>
+          <a:bodyPr rtlCol="0" anchor="ctr"/>
+          <a:lstStyle/>
+          <a:p>
+            <a:pPr algn="ctr"/>
+            <a:endParaRPr lang="ko-KR" altLang="en-US" dirty="0"/>
+          </a:p>
+        </p:txBody>
+      </p:sp>
+      <p:sp>
+        <p:nvSpPr>
+          <p:cNvPr id="6" name="L 도형 5">
+            <a:extLst>
+              <a:ext uri="{FF2B5EF4-FFF2-40B4-BE49-F238E27FC236}">
+                <a16:creationId xmlns:a16="http://schemas.microsoft.com/office/drawing/2014/main" id="{CD0274B5-2FBB-CCC2-3FDF-6B688797683C}"/>
+              </a:ext>
+            </a:extLst>
+          </p:cNvPr>
+          <p:cNvSpPr/>
+          <p:nvPr/>
+        </p:nvSpPr>
+        <p:spPr>
+          <a:xfrm rot="13500000">
+            <a:off x="11595610" y="123995"/>
+            <a:ext cx="180000" cy="180000"/>
+          </a:xfrm>
+          <a:prstGeom prst="corner">
+            <a:avLst/>
+          </a:prstGeom>
+          <a:solidFill>
+            <a:schemeClr val="bg1"/>
+          </a:solidFill>
+          <a:ln>
+            <a:noFill/>
+          </a:ln>
+        </p:spPr>
+        <p:style>
+          <a:lnRef idx="2">
+            <a:schemeClr val="accent1">
+              <a:shade val="15000"/>
+            </a:schemeClr>
+          </a:lnRef>
+          <a:fillRef idx="1">
+            <a:schemeClr val="accent1"/>
+          </a:fillRef>
+          <a:effectRef idx="0">
+            <a:schemeClr val="accent1"/>
+          </a:effectRef>
+          <a:fontRef idx="minor">
+            <a:schemeClr val="lt1"/>
+          </a:fontRef>
+        </p:style>
+        <p:txBody>
+          <a:bodyPr rtlCol="0" anchor="ctr"/>
+          <a:lstStyle/>
+          <a:p>
+            <a:pPr algn="ctr"/>
+            <a:endParaRPr lang="ko-KR" altLang="en-US" dirty="0"/>
+          </a:p>
+        </p:txBody>
+      </p:sp>
+      <p:sp>
+        <p:nvSpPr>
+          <p:cNvPr id="7" name="L 도형 6">
+            <a:extLst>
+              <a:ext uri="{FF2B5EF4-FFF2-40B4-BE49-F238E27FC236}">
+                <a16:creationId xmlns:a16="http://schemas.microsoft.com/office/drawing/2014/main" id="{F55AB5B5-649B-F4D3-54AC-E78424F260C5}"/>
+              </a:ext>
+            </a:extLst>
+          </p:cNvPr>
+          <p:cNvSpPr/>
+          <p:nvPr/>
+        </p:nvSpPr>
+        <p:spPr>
+          <a:xfrm rot="13500000">
+            <a:off x="11849405" y="126000"/>
+            <a:ext cx="180000" cy="180000"/>
+          </a:xfrm>
+          <a:prstGeom prst="corner">
+            <a:avLst/>
+          </a:prstGeom>
+          <a:solidFill>
+            <a:schemeClr val="bg1"/>
+          </a:solidFill>
+          <a:ln>
+            <a:noFill/>
+          </a:ln>
+        </p:spPr>
+        <p:style>
+          <a:lnRef idx="2">
+            <a:schemeClr val="accent1">
+              <a:shade val="15000"/>
+            </a:schemeClr>
+          </a:lnRef>
+          <a:fillRef idx="1">
+            <a:schemeClr val="accent1"/>
+          </a:fillRef>
+          <a:effectRef idx="0">
+            <a:schemeClr val="accent1"/>
+          </a:effectRef>
+          <a:fontRef idx="minor">
+            <a:schemeClr val="lt1"/>
+          </a:fontRef>
+        </p:style>
+        <p:txBody>
+          <a:bodyPr rtlCol="0" anchor="ctr"/>
+          <a:lstStyle/>
+          <a:p>
+            <a:pPr algn="ctr"/>
+            <a:endParaRPr lang="ko-KR" altLang="en-US" dirty="0"/>
+          </a:p>
+        </p:txBody>
+      </p:sp>
+      <p:sp>
+        <p:nvSpPr>
+          <p:cNvPr id="9" name="직사각형 8">
+            <a:extLst>
+              <a:ext uri="{FF2B5EF4-FFF2-40B4-BE49-F238E27FC236}">
+                <a16:creationId xmlns:a16="http://schemas.microsoft.com/office/drawing/2014/main" id="{3F27DF61-677C-F35A-C9F2-52DBB017AE96}"/>
+              </a:ext>
+            </a:extLst>
+          </p:cNvPr>
+          <p:cNvSpPr/>
+          <p:nvPr/>
+        </p:nvSpPr>
+        <p:spPr>
+          <a:xfrm>
+            <a:off x="-766" y="1059394"/>
+            <a:ext cx="2880000" cy="18000"/>
+          </a:xfrm>
+          <a:prstGeom prst="rect">
+            <a:avLst/>
+          </a:prstGeom>
+          <a:solidFill>
+            <a:schemeClr val="bg2"/>
+          </a:solidFill>
+          <a:ln>
+            <a:noFill/>
+          </a:ln>
+        </p:spPr>
+        <p:style>
+          <a:lnRef idx="2">
+            <a:schemeClr val="accent1">
+              <a:shade val="15000"/>
+            </a:schemeClr>
+          </a:lnRef>
+          <a:fillRef idx="1">
+            <a:schemeClr val="accent1"/>
+          </a:fillRef>
+          <a:effectRef idx="0">
+            <a:schemeClr val="accent1"/>
+          </a:effectRef>
+          <a:fontRef idx="minor">
+            <a:schemeClr val="lt1"/>
+          </a:fontRef>
+        </p:style>
+        <p:txBody>
+          <a:bodyPr rtlCol="0" anchor="ctr"/>
+          <a:lstStyle/>
+          <a:p>
+            <a:pPr algn="ctr"/>
+            <a:endParaRPr lang="ko-KR" altLang="en-US"/>
+          </a:p>
+        </p:txBody>
+      </p:sp>
+      <p:sp>
+        <p:nvSpPr>
+          <p:cNvPr id="10" name="직사각형 9">
+            <a:extLst>
+              <a:ext uri="{FF2B5EF4-FFF2-40B4-BE49-F238E27FC236}">
+                <a16:creationId xmlns:a16="http://schemas.microsoft.com/office/drawing/2014/main" id="{BB74B0A1-2171-CBBC-C714-22F54AD41B9A}"/>
+              </a:ext>
+            </a:extLst>
+          </p:cNvPr>
+          <p:cNvSpPr/>
+          <p:nvPr/>
+        </p:nvSpPr>
+        <p:spPr>
+          <a:xfrm>
+            <a:off x="2771234" y="1068394"/>
+            <a:ext cx="108000" cy="108000"/>
+          </a:xfrm>
+          <a:prstGeom prst="rect">
+            <a:avLst/>
+          </a:prstGeom>
+          <a:solidFill>
+            <a:schemeClr val="bg2"/>
+          </a:solidFill>
+          <a:ln>
+            <a:noFill/>
+          </a:ln>
+        </p:spPr>
+        <p:style>
+          <a:lnRef idx="2">
+            <a:schemeClr val="accent1">
+              <a:shade val="15000"/>
+            </a:schemeClr>
+          </a:lnRef>
+          <a:fillRef idx="1">
+            <a:schemeClr val="accent1"/>
+          </a:fillRef>
+          <a:effectRef idx="0">
+            <a:schemeClr val="accent1"/>
+          </a:effectRef>
+          <a:fontRef idx="minor">
+            <a:schemeClr val="lt1"/>
+          </a:fontRef>
+        </p:style>
+        <p:txBody>
+          <a:bodyPr rtlCol="0" anchor="ctr"/>
+          <a:lstStyle/>
+          <a:p>
+            <a:pPr algn="ctr"/>
+            <a:endParaRPr lang="ko-KR" altLang="en-US" dirty="0"/>
+          </a:p>
+        </p:txBody>
+      </p:sp>
+      <p:sp>
+        <p:nvSpPr>
+          <p:cNvPr id="11" name="제목 1">
+            <a:extLst>
+              <a:ext uri="{FF2B5EF4-FFF2-40B4-BE49-F238E27FC236}">
+                <a16:creationId xmlns:a16="http://schemas.microsoft.com/office/drawing/2014/main" id="{67BCF6BD-0DE3-693F-558E-46D224F3BF53}"/>
+              </a:ext>
+            </a:extLst>
+          </p:cNvPr>
+          <p:cNvSpPr txBox="1">
+            <a:spLocks/>
+          </p:cNvSpPr>
+          <p:nvPr/>
+        </p:nvSpPr>
+        <p:spPr>
+          <a:xfrm>
+            <a:off x="-63341" y="341275"/>
+            <a:ext cx="5101624" cy="1289849"/>
+          </a:xfrm>
+          <a:prstGeom prst="rect">
+            <a:avLst/>
+          </a:prstGeom>
+        </p:spPr>
+        <p:txBody>
+          <a:bodyPr/>
+          <a:lstStyle>
+            <a:lvl1pPr algn="l" defTabSz="914400" rtl="0" eaLnBrk="1" latinLnBrk="1" hangingPunct="1">
+              <a:lnSpc>
+                <a:spcPct val="90000"/>
+              </a:lnSpc>
+              <a:spcBef>
+                <a:spcPct val="0"/>
+              </a:spcBef>
+              <a:buNone/>
+              <a:defRPr sz="4400" kern="1200">
+                <a:solidFill>
+                  <a:schemeClr val="tx1"/>
+                </a:solidFill>
+                <a:latin typeface="+mj-lt"/>
+                <a:ea typeface="+mj-ea"/>
+                <a:cs typeface="+mj-cs"/>
+              </a:defRPr>
+            </a:lvl1pPr>
+          </a:lstStyle>
+          <a:p>
+            <a:r>
+              <a:rPr lang="ko-KR" altLang="en-US" b="1" dirty="0">
+                <a:latin typeface="Noto Sans KR" panose="020B0200000000000000" pitchFamily="50" charset="-127"/>
+                <a:ea typeface="Noto Sans KR" panose="020B0200000000000000" pitchFamily="50" charset="-127"/>
+              </a:rPr>
+              <a:t>   </a:t>
+            </a:r>
+            <a:r>
+              <a:rPr lang="ko-KR" altLang="en-US" sz="3600" b="1" dirty="0">
+                <a:latin typeface="Noto Sans KR Black" panose="020B0200000000000000" pitchFamily="50" charset="-127"/>
+                <a:ea typeface="Noto Sans KR Black" panose="020B0200000000000000" pitchFamily="50" charset="-127"/>
+              </a:rPr>
+              <a:t>화면설계서</a:t>
+            </a:r>
+            <a:endParaRPr lang="ko-KR" altLang="en-US" sz="3600" dirty="0">
+              <a:latin typeface="Noto Sans KR Black" panose="020B0200000000000000" pitchFamily="50" charset="-127"/>
+              <a:ea typeface="Noto Sans KR Black" panose="020B0200000000000000" pitchFamily="50" charset="-127"/>
+            </a:endParaRPr>
+          </a:p>
+        </p:txBody>
+      </p:sp>
+    </p:spTree>
+    <p:extLst>
+      <p:ext uri="{BB962C8B-B14F-4D97-AF65-F5344CB8AC3E}">
+        <p14:creationId xmlns:p14="http://schemas.microsoft.com/office/powerpoint/2010/main" val="3117432599"/>
+      </p:ext>
+    </p:extLst>
+  </p:cSld>
+  <p:clrMapOvr>
+    <a:masterClrMapping/>
+  </p:clrMapOvr>
+</p:sld>
+</file>
+
+<file path=ppt/slides/slide9.xml><?xml version="1.0" encoding="utf-8"?>
+<p:sld xmlns:a="http://schemas.openxmlformats.org/drawingml/2006/main" xmlns:r="http://schemas.openxmlformats.org/officeDocument/2006/relationships" xmlns:p="http://schemas.openxmlformats.org/presentationml/2006/main">
+  <p:cSld>
+    <p:spTree>
+      <p:nvGrpSpPr>
+        <p:cNvPr id="1" name=""/>
+        <p:cNvGrpSpPr/>
+        <p:nvPr/>
+      </p:nvGrpSpPr>
+      <p:grpSpPr>
+        <a:xfrm>
+          <a:off x="0" y="0"/>
+          <a:ext cx="0" cy="0"/>
+          <a:chOff x="0" y="0"/>
+          <a:chExt cx="0" cy="0"/>
+        </a:xfrm>
+      </p:grpSpPr>
+      <p:pic>
+        <p:nvPicPr>
+          <p:cNvPr id="8" name="그림 7" descr="텍스트, 스크린샷, 폰트, 도표이(가) 표시된 사진&#10;&#10;AI가 생성한 콘텐츠는 부정확할 수 있습니다.">
+            <a:extLst>
+              <a:ext uri="{FF2B5EF4-FFF2-40B4-BE49-F238E27FC236}">
+                <a16:creationId xmlns:a16="http://schemas.microsoft.com/office/drawing/2014/main" id="{341A2307-A79A-C41B-1381-A6D31B38B4FA}"/>
+              </a:ext>
+            </a:extLst>
+          </p:cNvPr>
+          <p:cNvPicPr>
+            <a:picLocks noChangeAspect="1"/>
+          </p:cNvPicPr>
+          <p:nvPr/>
+        </p:nvPicPr>
+        <p:blipFill>
+          <a:blip r:embed="rId2">
+            <a:extLst>
+              <a:ext uri="{28A0092B-C50C-407E-A947-70E740481C1C}">
+                <a14:useLocalDpi xmlns:a14="http://schemas.microsoft.com/office/drawing/2010/main" val="0"/>
+              </a:ext>
+            </a:extLst>
+          </a:blip>
+          <a:stretch>
+            <a:fillRect/>
+          </a:stretch>
+        </p:blipFill>
+        <p:spPr>
+          <a:xfrm>
+            <a:off x="972000" y="1008000"/>
+            <a:ext cx="10364647" cy="5830113"/>
+          </a:xfrm>
+          <a:prstGeom prst="rect">
+            <a:avLst/>
+          </a:prstGeom>
+        </p:spPr>
+      </p:pic>
+      <p:sp>
+        <p:nvSpPr>
+          <p:cNvPr id="3" name="직사각형 2">
+            <a:extLst>
+              <a:ext uri="{FF2B5EF4-FFF2-40B4-BE49-F238E27FC236}">
+                <a16:creationId xmlns:a16="http://schemas.microsoft.com/office/drawing/2014/main" id="{A1BC658B-3A71-2467-CB33-03A51800EBDC}"/>
+              </a:ext>
+            </a:extLst>
+          </p:cNvPr>
+          <p:cNvSpPr/>
+          <p:nvPr/>
+        </p:nvSpPr>
+        <p:spPr>
+          <a:xfrm>
+            <a:off x="-1" y="0"/>
+            <a:ext cx="12193200" cy="432000"/>
+          </a:xfrm>
+          <a:prstGeom prst="rect">
+            <a:avLst/>
+          </a:prstGeom>
+          <a:solidFill>
+            <a:srgbClr val="FFC000"/>
+          </a:solidFill>
+          <a:ln>
+            <a:noFill/>
+          </a:ln>
+        </p:spPr>
+        <p:style>
+          <a:lnRef idx="2">
+            <a:schemeClr val="accent1">
+              <a:shade val="15000"/>
+            </a:schemeClr>
+          </a:lnRef>
+          <a:fillRef idx="1">
+            <a:schemeClr val="accent1"/>
+          </a:fillRef>
+          <a:effectRef idx="0">
+            <a:schemeClr val="accent1"/>
+          </a:effectRef>
+          <a:fontRef idx="minor">
+            <a:schemeClr val="lt1"/>
+          </a:fontRef>
+        </p:style>
+        <p:txBody>
+          <a:bodyPr rtlCol="0" anchor="ctr"/>
+          <a:lstStyle/>
+          <a:p>
+            <a:pPr algn="ctr"/>
+            <a:endParaRPr lang="ko-KR" altLang="en-US"/>
+          </a:p>
+        </p:txBody>
+      </p:sp>
+      <p:sp>
+        <p:nvSpPr>
+          <p:cNvPr id="4" name="사각형: 잘린 한쪽 모서리 3">
+            <a:extLst>
+              <a:ext uri="{FF2B5EF4-FFF2-40B4-BE49-F238E27FC236}">
+                <a16:creationId xmlns:a16="http://schemas.microsoft.com/office/drawing/2014/main" id="{6C29B8CC-D569-0884-2DE9-9DFCA7850BB2}"/>
+              </a:ext>
+            </a:extLst>
+          </p:cNvPr>
+          <p:cNvSpPr/>
+          <p:nvPr/>
+        </p:nvSpPr>
+        <p:spPr>
+          <a:xfrm>
+            <a:off x="-766" y="317921"/>
+            <a:ext cx="2880000" cy="775120"/>
+          </a:xfrm>
+          <a:prstGeom prst="snip1Rect">
+            <a:avLst/>
+          </a:prstGeom>
+          <a:solidFill>
+            <a:schemeClr val="bg1"/>
+          </a:solidFill>
+          <a:ln>
+            <a:noFill/>
+          </a:ln>
+        </p:spPr>
+        <p:style>
+          <a:lnRef idx="2">
+            <a:schemeClr val="accent1">
+              <a:shade val="15000"/>
+            </a:schemeClr>
+          </a:lnRef>
+          <a:fillRef idx="1">
+            <a:schemeClr val="accent1"/>
+          </a:fillRef>
+          <a:effectRef idx="0">
+            <a:schemeClr val="accent1"/>
+          </a:effectRef>
+          <a:fontRef idx="minor">
+            <a:schemeClr val="lt1"/>
+          </a:fontRef>
+        </p:style>
+        <p:txBody>
+          <a:bodyPr rtlCol="0" anchor="ctr"/>
+          <a:lstStyle/>
+          <a:p>
+            <a:pPr algn="ctr"/>
+            <a:endParaRPr lang="ko-KR" altLang="en-US" dirty="0"/>
+          </a:p>
+        </p:txBody>
+      </p:sp>
+      <p:sp>
+        <p:nvSpPr>
+          <p:cNvPr id="5" name="L 도형 4">
+            <a:extLst>
+              <a:ext uri="{FF2B5EF4-FFF2-40B4-BE49-F238E27FC236}">
+                <a16:creationId xmlns:a16="http://schemas.microsoft.com/office/drawing/2014/main" id="{4F9348AA-9546-4A2C-458A-3C5E0E7A8F87}"/>
+              </a:ext>
+            </a:extLst>
+          </p:cNvPr>
+          <p:cNvSpPr/>
+          <p:nvPr/>
+        </p:nvSpPr>
+        <p:spPr>
+          <a:xfrm rot="13500000">
+            <a:off x="11340286" y="125999"/>
+            <a:ext cx="180000" cy="180000"/>
+          </a:xfrm>
+          <a:prstGeom prst="corner">
+            <a:avLst/>
+          </a:prstGeom>
+          <a:solidFill>
+            <a:schemeClr val="bg1"/>
+          </a:solidFill>
+          <a:ln>
+            <a:noFill/>
+          </a:ln>
+        </p:spPr>
+        <p:style>
+          <a:lnRef idx="2">
+            <a:schemeClr val="accent1">
+              <a:shade val="15000"/>
+            </a:schemeClr>
+          </a:lnRef>
+          <a:fillRef idx="1">
+            <a:schemeClr val="accent1"/>
+          </a:fillRef>
+          <a:effectRef idx="0">
+            <a:schemeClr val="accent1"/>
+          </a:effectRef>
+          <a:fontRef idx="minor">
+            <a:schemeClr val="lt1"/>
+          </a:fontRef>
+        </p:style>
+        <p:txBody>
+          <a:bodyPr rtlCol="0" anchor="ctr"/>
+          <a:lstStyle/>
+          <a:p>
+            <a:pPr algn="ctr"/>
+            <a:endParaRPr lang="ko-KR" altLang="en-US" dirty="0"/>
+          </a:p>
+        </p:txBody>
+      </p:sp>
+      <p:sp>
+        <p:nvSpPr>
+          <p:cNvPr id="6" name="L 도형 5">
+            <a:extLst>
+              <a:ext uri="{FF2B5EF4-FFF2-40B4-BE49-F238E27FC236}">
+                <a16:creationId xmlns:a16="http://schemas.microsoft.com/office/drawing/2014/main" id="{CD0274B5-2FBB-CCC2-3FDF-6B688797683C}"/>
+              </a:ext>
+            </a:extLst>
+          </p:cNvPr>
+          <p:cNvSpPr/>
+          <p:nvPr/>
+        </p:nvSpPr>
+        <p:spPr>
+          <a:xfrm rot="13500000">
+            <a:off x="11595610" y="123995"/>
+            <a:ext cx="180000" cy="180000"/>
+          </a:xfrm>
+          <a:prstGeom prst="corner">
+            <a:avLst/>
+          </a:prstGeom>
+          <a:solidFill>
+            <a:schemeClr val="bg1"/>
+          </a:solidFill>
+          <a:ln>
+            <a:noFill/>
+          </a:ln>
+        </p:spPr>
+        <p:style>
+          <a:lnRef idx="2">
+            <a:schemeClr val="accent1">
+              <a:shade val="15000"/>
+            </a:schemeClr>
+          </a:lnRef>
+          <a:fillRef idx="1">
+            <a:schemeClr val="accent1"/>
+          </a:fillRef>
+          <a:effectRef idx="0">
+            <a:schemeClr val="accent1"/>
+          </a:effectRef>
+          <a:fontRef idx="minor">
+            <a:schemeClr val="lt1"/>
+          </a:fontRef>
+        </p:style>
+        <p:txBody>
+          <a:bodyPr rtlCol="0" anchor="ctr"/>
+          <a:lstStyle/>
+          <a:p>
+            <a:pPr algn="ctr"/>
+            <a:endParaRPr lang="ko-KR" altLang="en-US" dirty="0"/>
+          </a:p>
+        </p:txBody>
+      </p:sp>
+      <p:sp>
+        <p:nvSpPr>
+          <p:cNvPr id="7" name="L 도형 6">
+            <a:extLst>
+              <a:ext uri="{FF2B5EF4-FFF2-40B4-BE49-F238E27FC236}">
+                <a16:creationId xmlns:a16="http://schemas.microsoft.com/office/drawing/2014/main" id="{F55AB5B5-649B-F4D3-54AC-E78424F260C5}"/>
+              </a:ext>
+            </a:extLst>
+          </p:cNvPr>
+          <p:cNvSpPr/>
+          <p:nvPr/>
+        </p:nvSpPr>
+        <p:spPr>
+          <a:xfrm rot="13500000">
+            <a:off x="11849405" y="126000"/>
+            <a:ext cx="180000" cy="180000"/>
+          </a:xfrm>
+          <a:prstGeom prst="corner">
+            <a:avLst/>
+          </a:prstGeom>
+          <a:solidFill>
+            <a:schemeClr val="bg1"/>
+          </a:solidFill>
+          <a:ln>
+            <a:noFill/>
+          </a:ln>
+        </p:spPr>
+        <p:style>
+          <a:lnRef idx="2">
+            <a:schemeClr val="accent1">
+              <a:shade val="15000"/>
+            </a:schemeClr>
+          </a:lnRef>
+          <a:fillRef idx="1">
+            <a:schemeClr val="accent1"/>
+          </a:fillRef>
+          <a:effectRef idx="0">
+            <a:schemeClr val="accent1"/>
+          </a:effectRef>
+          <a:fontRef idx="minor">
+            <a:schemeClr val="lt1"/>
+          </a:fontRef>
+        </p:style>
+        <p:txBody>
+          <a:bodyPr rtlCol="0" anchor="ctr"/>
+          <a:lstStyle/>
+          <a:p>
+            <a:pPr algn="ctr"/>
+            <a:endParaRPr lang="ko-KR" altLang="en-US" dirty="0"/>
+          </a:p>
+        </p:txBody>
+      </p:sp>
+      <p:sp>
+        <p:nvSpPr>
+          <p:cNvPr id="9" name="직사각형 8">
+            <a:extLst>
+              <a:ext uri="{FF2B5EF4-FFF2-40B4-BE49-F238E27FC236}">
+                <a16:creationId xmlns:a16="http://schemas.microsoft.com/office/drawing/2014/main" id="{3F27DF61-677C-F35A-C9F2-52DBB017AE96}"/>
+              </a:ext>
+            </a:extLst>
+          </p:cNvPr>
+          <p:cNvSpPr/>
+          <p:nvPr/>
+        </p:nvSpPr>
+        <p:spPr>
+          <a:xfrm>
+            <a:off x="-766" y="1059394"/>
+            <a:ext cx="2880000" cy="18000"/>
+          </a:xfrm>
+          <a:prstGeom prst="rect">
+            <a:avLst/>
+          </a:prstGeom>
+          <a:solidFill>
+            <a:schemeClr val="bg2"/>
+          </a:solidFill>
+          <a:ln>
+            <a:noFill/>
+          </a:ln>
+        </p:spPr>
+        <p:style>
+          <a:lnRef idx="2">
+            <a:schemeClr val="accent1">
+              <a:shade val="15000"/>
+            </a:schemeClr>
+          </a:lnRef>
+          <a:fillRef idx="1">
+            <a:schemeClr val="accent1"/>
+          </a:fillRef>
+          <a:effectRef idx="0">
+            <a:schemeClr val="accent1"/>
+          </a:effectRef>
+          <a:fontRef idx="minor">
+            <a:schemeClr val="lt1"/>
+          </a:fontRef>
+        </p:style>
+        <p:txBody>
+          <a:bodyPr rtlCol="0" anchor="ctr"/>
+          <a:lstStyle/>
+          <a:p>
+            <a:pPr algn="ctr"/>
+            <a:endParaRPr lang="ko-KR" altLang="en-US"/>
+          </a:p>
+        </p:txBody>
+      </p:sp>
+      <p:sp>
+        <p:nvSpPr>
+          <p:cNvPr id="10" name="직사각형 9">
+            <a:extLst>
+              <a:ext uri="{FF2B5EF4-FFF2-40B4-BE49-F238E27FC236}">
+                <a16:creationId xmlns:a16="http://schemas.microsoft.com/office/drawing/2014/main" id="{BB74B0A1-2171-CBBC-C714-22F54AD41B9A}"/>
+              </a:ext>
+            </a:extLst>
+          </p:cNvPr>
+          <p:cNvSpPr/>
+          <p:nvPr/>
+        </p:nvSpPr>
+        <p:spPr>
+          <a:xfrm>
+            <a:off x="2771234" y="1068394"/>
+            <a:ext cx="108000" cy="108000"/>
+          </a:xfrm>
+          <a:prstGeom prst="rect">
+            <a:avLst/>
+          </a:prstGeom>
+          <a:solidFill>
+            <a:schemeClr val="bg2"/>
+          </a:solidFill>
+          <a:ln>
+            <a:noFill/>
+          </a:ln>
+        </p:spPr>
+        <p:style>
+          <a:lnRef idx="2">
+            <a:schemeClr val="accent1">
+              <a:shade val="15000"/>
+            </a:schemeClr>
+          </a:lnRef>
+          <a:fillRef idx="1">
+            <a:schemeClr val="accent1"/>
+          </a:fillRef>
+          <a:effectRef idx="0">
+            <a:schemeClr val="accent1"/>
+          </a:effectRef>
+          <a:fontRef idx="minor">
+            <a:schemeClr val="lt1"/>
+          </a:fontRef>
+        </p:style>
+        <p:txBody>
+          <a:bodyPr rtlCol="0" anchor="ctr"/>
+          <a:lstStyle/>
+          <a:p>
+            <a:pPr algn="ctr"/>
+            <a:endParaRPr lang="ko-KR" altLang="en-US" dirty="0"/>
+          </a:p>
+        </p:txBody>
+      </p:sp>
+      <p:sp>
+        <p:nvSpPr>
+          <p:cNvPr id="11" name="제목 1">
+            <a:extLst>
+              <a:ext uri="{FF2B5EF4-FFF2-40B4-BE49-F238E27FC236}">
+                <a16:creationId xmlns:a16="http://schemas.microsoft.com/office/drawing/2014/main" id="{67BCF6BD-0DE3-693F-558E-46D224F3BF53}"/>
+              </a:ext>
+            </a:extLst>
+          </p:cNvPr>
+          <p:cNvSpPr txBox="1">
+            <a:spLocks/>
+          </p:cNvSpPr>
+          <p:nvPr/>
+        </p:nvSpPr>
+        <p:spPr>
+          <a:xfrm>
+            <a:off x="-63341" y="341275"/>
+            <a:ext cx="5101624" cy="1289849"/>
+          </a:xfrm>
+          <a:prstGeom prst="rect">
+            <a:avLst/>
+          </a:prstGeom>
+        </p:spPr>
+        <p:txBody>
+          <a:bodyPr/>
+          <a:lstStyle>
+            <a:lvl1pPr algn="l" defTabSz="914400" rtl="0" eaLnBrk="1" latinLnBrk="1" hangingPunct="1">
+              <a:lnSpc>
+                <a:spcPct val="90000"/>
+              </a:lnSpc>
+              <a:spcBef>
+                <a:spcPct val="0"/>
+              </a:spcBef>
+              <a:buNone/>
+              <a:defRPr sz="4400" kern="1200">
+                <a:solidFill>
+                  <a:schemeClr val="tx1"/>
+                </a:solidFill>
+                <a:latin typeface="+mj-lt"/>
+                <a:ea typeface="+mj-ea"/>
+                <a:cs typeface="+mj-cs"/>
+              </a:defRPr>
+            </a:lvl1pPr>
+          </a:lstStyle>
+          <a:p>
+            <a:r>
+              <a:rPr lang="ko-KR" altLang="en-US" b="1" dirty="0">
+                <a:latin typeface="Noto Sans KR" panose="020B0200000000000000" pitchFamily="50" charset="-127"/>
+                <a:ea typeface="Noto Sans KR" panose="020B0200000000000000" pitchFamily="50" charset="-127"/>
+              </a:rPr>
+              <a:t>   </a:t>
+            </a:r>
+            <a:r>
+              <a:rPr lang="ko-KR" altLang="en-US" sz="3600" b="1" dirty="0">
+                <a:latin typeface="Noto Sans KR Black" panose="020B0200000000000000" pitchFamily="50" charset="-127"/>
+                <a:ea typeface="Noto Sans KR Black" panose="020B0200000000000000" pitchFamily="50" charset="-127"/>
+              </a:rPr>
+              <a:t>화면설계서</a:t>
+            </a:r>
+            <a:endParaRPr lang="ko-KR" altLang="en-US" sz="3600" dirty="0">
+              <a:latin typeface="Noto Sans KR Black" panose="020B0200000000000000" pitchFamily="50" charset="-127"/>
+              <a:ea typeface="Noto Sans KR Black" panose="020B0200000000000000" pitchFamily="50" charset="-127"/>
+            </a:endParaRPr>
+          </a:p>
+        </p:txBody>
+      </p:sp>
+    </p:spTree>
+    <p:extLst>
+      <p:ext uri="{BB962C8B-B14F-4D97-AF65-F5344CB8AC3E}">
+        <p14:creationId xmlns:p14="http://schemas.microsoft.com/office/powerpoint/2010/main" val="2354078391"/>
       </p:ext>
     </p:extLst>
   </p:cSld>

--- a/1차프로젝트/1. 기획서_신혜린.pptx
+++ b/1차프로젝트/1. 기획서_신혜린.pptx
@@ -11118,8 +11118,8 @@
         </p:nvSpPr>
         <p:spPr>
           <a:xfrm>
-            <a:off x="6700954" y="4296458"/>
-            <a:ext cx="5401621" cy="2443455"/>
+            <a:off x="6618767" y="4298428"/>
+            <a:ext cx="5531327" cy="2443455"/>
           </a:xfrm>
           <a:prstGeom prst="rect">
             <a:avLst/>
@@ -11127,7 +11127,7 @@
         </p:spPr>
         <p:txBody>
           <a:bodyPr vert="horz" lIns="91440" tIns="45720" rIns="91440" bIns="45720" rtlCol="0">
-            <a:normAutofit lnSpcReduction="10000"/>
+            <a:normAutofit/>
           </a:bodyPr>
           <a:lstStyle>
             <a:lvl1pPr marL="228600" indent="-228600" algn="l" defTabSz="914400" rtl="0" eaLnBrk="1" latinLnBrk="1" hangingPunct="1">
@@ -11422,20 +11422,7 @@
                 <a:latin typeface="Noto Sans KR" panose="020B0200000000000000" pitchFamily="50" charset="-127"/>
                 <a:ea typeface="Noto Sans KR" panose="020B0200000000000000" pitchFamily="50" charset="-127"/>
               </a:rPr>
-              <a:t>도출하고 이를 기반으로 건강 관리 리포트를 </a:t>
-            </a:r>
-            <a:br>
-              <a:rPr lang="en-US" altLang="ko-KR" sz="1800" dirty="0">
-                <a:latin typeface="Noto Sans KR" panose="020B0200000000000000" pitchFamily="50" charset="-127"/>
-                <a:ea typeface="Noto Sans KR" panose="020B0200000000000000" pitchFamily="50" charset="-127"/>
-              </a:rPr>
-            </a:br>
-            <a:r>
-              <a:rPr lang="ko-KR" altLang="en-US" sz="1800" dirty="0">
-                <a:latin typeface="Noto Sans KR" panose="020B0200000000000000" pitchFamily="50" charset="-127"/>
-                <a:ea typeface="Noto Sans KR" panose="020B0200000000000000" pitchFamily="50" charset="-127"/>
-              </a:rPr>
-              <a:t>생성한다</a:t>
+              <a:t>도출하고 이를 기반으로 건강 관리 리포트를 생성한다</a:t>
             </a:r>
             <a:r>
               <a:rPr lang="en-US" altLang="ko-KR" sz="1800" dirty="0">

--- a/1차프로젝트/1. 기획서_신혜린.pptx
+++ b/1차프로젝트/1. 기획서_신혜린.pptx
@@ -9725,7 +9725,7 @@
         </p:spPr>
         <p:txBody>
           <a:bodyPr>
-            <a:normAutofit fontScale="92500"/>
+            <a:normAutofit fontScale="92500" lnSpcReduction="10000"/>
           </a:bodyPr>
           <a:lstStyle/>
           <a:p>
@@ -9762,6 +9762,9 @@
           </a:p>
           <a:p>
             <a:pPr>
+              <a:lnSpc>
+                <a:spcPct val="100000"/>
+              </a:lnSpc>
               <a:buFont typeface="Wingdings" panose="05000000000000000000" pitchFamily="2" charset="2"/>
               <a:buChar char="§"/>
             </a:pPr>
@@ -9810,6 +9813,9 @@
           </a:p>
           <a:p>
             <a:pPr>
+              <a:lnSpc>
+                <a:spcPct val="100000"/>
+              </a:lnSpc>
               <a:buFont typeface="Wingdings" panose="05000000000000000000" pitchFamily="2" charset="2"/>
               <a:buChar char="§"/>
             </a:pPr>
@@ -10062,7 +10068,7 @@
         </p:spPr>
         <p:txBody>
           <a:bodyPr vert="horz" lIns="91440" tIns="45720" rIns="91440" bIns="45720" rtlCol="0">
-            <a:normAutofit fontScale="92500" lnSpcReduction="10000"/>
+            <a:normAutofit fontScale="92500" lnSpcReduction="20000"/>
           </a:bodyPr>
           <a:lstStyle>
             <a:lvl1pPr marL="228600" indent="-228600" algn="l" defTabSz="914400" rtl="0" eaLnBrk="1" latinLnBrk="1" hangingPunct="1">
@@ -10262,6 +10268,9 @@
           </a:p>
           <a:p>
             <a:pPr>
+              <a:lnSpc>
+                <a:spcPct val="110000"/>
+              </a:lnSpc>
               <a:buFont typeface="Wingdings" panose="05000000000000000000" pitchFamily="2" charset="2"/>
               <a:buChar char="§"/>
             </a:pPr>
@@ -10343,6 +10352,9 @@
           </a:p>
           <a:p>
             <a:pPr>
+              <a:lnSpc>
+                <a:spcPct val="110000"/>
+              </a:lnSpc>
               <a:buFont typeface="Wingdings" panose="05000000000000000000" pitchFamily="2" charset="2"/>
               <a:buChar char="§"/>
             </a:pPr>
@@ -10656,7 +10668,7 @@
         </p:spPr>
         <p:txBody>
           <a:bodyPr vert="horz" lIns="91440" tIns="45720" rIns="91440" bIns="45720" rtlCol="0">
-            <a:normAutofit fontScale="92500" lnSpcReduction="10000"/>
+            <a:normAutofit fontScale="92500" lnSpcReduction="20000"/>
           </a:bodyPr>
           <a:lstStyle>
             <a:lvl1pPr marL="228600" indent="-228600" algn="l" defTabSz="914400" rtl="0" eaLnBrk="1" latinLnBrk="1" hangingPunct="1">
@@ -10842,13 +10854,16 @@
             <a:pPr marL="0" indent="0">
               <a:buNone/>
             </a:pPr>
-            <a:endParaRPr lang="ko-KR" altLang="en-US" sz="900" dirty="0">
+            <a:endParaRPr lang="ko-KR" altLang="en-US" sz="100" dirty="0">
               <a:latin typeface="Noto Sans KR" panose="020B0200000000000000" pitchFamily="50" charset="-127"/>
               <a:ea typeface="Noto Sans KR" panose="020B0200000000000000" pitchFamily="50" charset="-127"/>
             </a:endParaRPr>
           </a:p>
           <a:p>
             <a:pPr>
+              <a:lnSpc>
+                <a:spcPct val="110000"/>
+              </a:lnSpc>
               <a:buFont typeface="Wingdings" panose="05000000000000000000" pitchFamily="2" charset="2"/>
               <a:buChar char="§"/>
             </a:pPr>
@@ -10869,6 +10884,9 @@
           </a:p>
           <a:p>
             <a:pPr>
+              <a:lnSpc>
+                <a:spcPct val="110000"/>
+              </a:lnSpc>
               <a:buFont typeface="Wingdings" panose="05000000000000000000" pitchFamily="2" charset="2"/>
               <a:buChar char="§"/>
             </a:pPr>
@@ -11326,13 +11344,16 @@
             <a:pPr marL="0" indent="0">
               <a:buNone/>
             </a:pPr>
-            <a:endParaRPr lang="ko-KR" altLang="en-US" sz="900" dirty="0">
+            <a:endParaRPr lang="ko-KR" altLang="en-US" sz="100" dirty="0">
               <a:latin typeface="Noto Sans KR" panose="020B0200000000000000" pitchFamily="50" charset="-127"/>
               <a:ea typeface="Noto Sans KR" panose="020B0200000000000000" pitchFamily="50" charset="-127"/>
             </a:endParaRPr>
           </a:p>
           <a:p>
             <a:pPr>
+              <a:lnSpc>
+                <a:spcPct val="100000"/>
+              </a:lnSpc>
               <a:buFont typeface="Wingdings" panose="05000000000000000000" pitchFamily="2" charset="2"/>
               <a:buChar char="§"/>
             </a:pPr>
@@ -11366,6 +11387,9 @@
           </a:p>
           <a:p>
             <a:pPr>
+              <a:lnSpc>
+                <a:spcPct val="100000"/>
+              </a:lnSpc>
               <a:buFont typeface="Wingdings" panose="05000000000000000000" pitchFamily="2" charset="2"/>
               <a:buChar char="§"/>
             </a:pPr>
@@ -11533,7 +11557,7 @@
         </p:nvSpPr>
         <p:spPr>
           <a:xfrm>
-            <a:off x="6078985" y="3822876"/>
+            <a:off x="6024507" y="3828252"/>
             <a:ext cx="666262" cy="1323439"/>
           </a:xfrm>
           <a:prstGeom prst="rect">
